--- a/AI-for-Excel-Demo-Day.pptx
+++ b/AI-for-Excel-Demo-Day.pptx
@@ -16,7 +16,9 @@
     <p:sldId id="264" r:id="rId10"/>
     <p:sldId id="265" r:id="rId11"/>
     <p:sldId id="266" r:id="rId12"/>
+    <p:sldId id="270" r:id="rId21"/>
     <p:sldId id="267" r:id="rId13"/>
+    <p:sldId id="271" r:id="rId22"/>
     <p:sldId id="268" r:id="rId14"/>
     <p:sldId id="269" r:id="rId15"/>
   </p:sldIdLst>
@@ -691,7 +693,7 @@
           <a:p>
             <a:r>
               <a:rPr lang="en-US" dirty="0"/>
-              <a:t>Walk the GOOD prompt first. Read it. Pause. Ask the room: "What's missing?" Answer using the four-part recipe -- no Source, no Expectations, no Context. Then walk the GREAT prompt. Read it slowly. Point out: Source named explicitly (the wholesale-customers table), Context gives the encoding (1 = HoReCa, 2 = Retail), Goal is precise (compute total annual spend per customer), Expectations set the format (two-row table, whole dollars). Optional: paste the GREAT prompt live into Copilot and show that the result is what you actually wanted.</a:t>
+              <a:t>Walk the GOOD prompt first. Read it. Pause. Ask the room: "What's missing?" -- it's vague, and it's fighting a messy table. Then the GREAT prompt, and this is the teaching moment: it runs on the CLEANED table from the Power Query step, and it spells out all four ingredients of the recipe. Point to each label as you read: CONTEXT (the channel-strategy review -- the business why), GOAL (total Spend by Channel), SOURCE (the cleaned wholesale table), EXPECTATIONS (two-row table, whole dollars, largest first). Make the key distinction: the Context is the one thing clean data can NEVER give you -- the model can't know why you're asking. The other three got short because the data is tidy. This is the by-the-book version, all four ingredients, one sentence. Tee up the next slide: 'and in real life you don't spell out all four every time -- here's when you stop.'</a:t>
             </a:r>
             <a:endParaRPr lang="en-US" dirty="0"/>
           </a:p>
@@ -956,6 +958,182 @@
             <a:r>
               <a:rPr lang="en-US" dirty="0"/>
               <a:t>Open the floor. Have the takeaway PDF link ready to drop in chat. If there's silence, prime with: "The question I get most is -- should I be using Copilot or ChatGPT for Excel?" -- then answer it. End on time. Always.</a:t>
+            </a:r>
+            <a:endParaRPr lang="en-US" dirty="0"/>
+          </a:p>
+        </p:txBody>
+      </p:sp>
+      <p:sp>
+        <p:nvSpPr>
+          <p:cNvPr id="4" name="Slide Number Placeholder 3"/>
+          <p:cNvSpPr>
+            <a:spLocks noGrp="1"/>
+          </p:cNvSpPr>
+          <p:nvPr>
+            <p:ph type="sldNum" sz="quarter" idx="10"/>
+          </p:nvPr>
+        </p:nvSpPr>
+        <p:spPr/>
+        <p:txBody>
+          <a:bodyPr/>
+          <a:lstStyle/>
+          <a:p>
+            <a:fld id="{F7021451-1387-4CA6-816F-3879F97B5CBC}" type="slidenum">
+              <a:rPr lang="en-US"/>
+              <a:t>14</a:t>
+            </a:fld>
+            <a:endParaRPr lang="en-US"/>
+          </a:p>
+        </p:txBody>
+      </p:sp>
+    </p:spTree>
+    <p:extLst>
+      <p:ext uri="{BB962C8B-B14F-4D97-AF65-F5344CB8AC3E}">
+        <p14:creationId xmlns:p14="http://schemas.microsoft.com/office/powerpoint/2010/main" val="1024086991"/>
+      </p:ext>
+    </p:extLst>
+  </p:cSld>
+  <p:clrMapOvr>
+    <a:masterClrMapping/>
+  </p:clrMapOvr>
+</p:notes>
+</file>
+
+<file path=ppt/notesSlides/notesSlide15.xml><?xml version="1.0" encoding="utf-8"?>
+<p:notes xmlns:a="http://schemas.openxmlformats.org/drawingml/2006/main" xmlns:r="http://schemas.openxmlformats.org/officeDocument/2006/relationships" xmlns:p="http://schemas.openxmlformats.org/presentationml/2006/main">
+  <p:cSld>
+    <p:spTree>
+      <p:nvGrpSpPr>
+        <p:cNvPr id="1" name=""/>
+        <p:cNvGrpSpPr/>
+        <p:nvPr/>
+      </p:nvGrpSpPr>
+      <p:grpSpPr>
+        <a:xfrm>
+          <a:off x="0" y="0"/>
+          <a:ext cx="0" cy="0"/>
+          <a:chOff x="0" y="0"/>
+          <a:chExt cx="0" cy="0"/>
+        </a:xfrm>
+      </p:grpSpPr>
+      <p:sp>
+        <p:nvSpPr>
+          <p:cNvPr id="2" name="Slide Image Placeholder 1"/>
+          <p:cNvSpPr>
+            <a:spLocks noGrp="1" noRot="1" noChangeAspect="1"/>
+          </p:cNvSpPr>
+          <p:nvPr>
+            <p:ph type="sldImg"/>
+          </p:nvPr>
+        </p:nvSpPr>
+        <p:spPr/>
+      </p:sp>
+      <p:sp>
+        <p:nvSpPr>
+          <p:cNvPr id="3" name="Notes Placeholder 2"/>
+          <p:cNvSpPr>
+            <a:spLocks noGrp="1"/>
+          </p:cNvSpPr>
+          <p:nvPr>
+            <p:ph type="body" idx="1"/>
+          </p:nvPr>
+        </p:nvSpPr>
+        <p:spPr/>
+        <p:txBody>
+          <a:bodyPr/>
+          <a:lstStyle/>
+          <a:p>
+            <a:r>
+              <a:rPr lang="en-US" dirty="0"/>
+              <a:t>LIVE DEMO (optional) or talk-through. This is the payoff of cleaning the data: the questions get conversational. Re-ask on the CLEANED table and just keep going -- break it down by Category, rank Regions, compare Fresh vs Grocery. Point out what is NOT in these prompts: no '1 = HoReCa', no list of six columns. The clean table carries all of that, so you can think out loud. Land the analogy slowly: GCSE (Goal, Context, Source, Expectations) is training wheels. Starting out, hit all four every time. As you get fluent you drop the ones the data already makes obvious -- the way you stop conjugating every verb in your head once you can actually speak the language. The recipe never goes away; reach back for it whenever an answer comes back wrong. Close warm, then move to 'what we did not cover.'</a:t>
+            </a:r>
+            <a:endParaRPr lang="en-US" dirty="0"/>
+          </a:p>
+        </p:txBody>
+      </p:sp>
+      <p:sp>
+        <p:nvSpPr>
+          <p:cNvPr id="4" name="Slide Number Placeholder 3"/>
+          <p:cNvSpPr>
+            <a:spLocks noGrp="1"/>
+          </p:cNvSpPr>
+          <p:nvPr>
+            <p:ph type="sldNum" sz="quarter" idx="10"/>
+          </p:nvPr>
+        </p:nvSpPr>
+        <p:spPr/>
+        <p:txBody>
+          <a:bodyPr/>
+          <a:lstStyle/>
+          <a:p>
+            <a:fld id="{F7021451-1387-4CA6-816F-3879F97B5CBC}" type="slidenum">
+              <a:rPr lang="en-US"/>
+              <a:t>12</a:t>
+            </a:fld>
+            <a:endParaRPr lang="en-US"/>
+          </a:p>
+        </p:txBody>
+      </p:sp>
+    </p:spTree>
+    <p:extLst>
+      <p:ext uri="{BB962C8B-B14F-4D97-AF65-F5344CB8AC3E}">
+        <p14:creationId xmlns:p14="http://schemas.microsoft.com/office/powerpoint/2010/main" val="1024086991"/>
+      </p:ext>
+    </p:extLst>
+  </p:cSld>
+  <p:clrMapOvr>
+    <a:masterClrMapping/>
+  </p:clrMapOvr>
+</p:notes>
+</file>
+
+<file path=ppt/notesSlides/notesSlide16.xml><?xml version="1.0" encoding="utf-8"?>
+<p:notes xmlns:a="http://schemas.openxmlformats.org/drawingml/2006/main" xmlns:r="http://schemas.openxmlformats.org/officeDocument/2006/relationships" xmlns:p="http://schemas.openxmlformats.org/presentationml/2006/main">
+  <p:cSld>
+    <p:spTree>
+      <p:nvGrpSpPr>
+        <p:cNvPr id="1" name=""/>
+        <p:cNvGrpSpPr/>
+        <p:nvPr/>
+      </p:nvGrpSpPr>
+      <p:grpSpPr>
+        <a:xfrm>
+          <a:off x="0" y="0"/>
+          <a:ext cx="0" cy="0"/>
+          <a:chOff x="0" y="0"/>
+          <a:chExt cx="0" cy="0"/>
+        </a:xfrm>
+      </p:grpSpPr>
+      <p:sp>
+        <p:nvSpPr>
+          <p:cNvPr id="2" name="Slide Image Placeholder 1"/>
+          <p:cNvSpPr>
+            <a:spLocks noGrp="1" noRot="1" noChangeAspect="1"/>
+          </p:cNvSpPr>
+          <p:nvPr>
+            <p:ph type="sldImg"/>
+          </p:nvPr>
+        </p:nvSpPr>
+        <p:spPr/>
+      </p:sp>
+      <p:sp>
+        <p:nvSpPr>
+          <p:cNvPr id="3" name="Notes Placeholder 2"/>
+          <p:cNvSpPr>
+            <a:spLocks noGrp="1"/>
+          </p:cNvSpPr>
+          <p:nvPr>
+            <p:ph type="body" idx="1"/>
+          </p:nvPr>
+        </p:nvSpPr>
+        <p:spPr/>
+        <p:txBody>
+          <a:bodyPr/>
+          <a:lstStyle/>
+          <a:p>
+            <a:r>
+              <a:rPr lang="en-US" dirty="0"/>
+              <a:t>THE CTA. Say it plainly and warmly, do not mumble it. "This whole session was recorded. If you want the recording, it lives in my membership, the Modern Excel AI Stack." Make the value concrete: it's ten dollars a month, you get today's recording, the full back catalog to binge, and every new workshop as it lands, and you can cancel anytime. Tie it back to the previous slide: 'everything I just said we did NOT cover today, that is what is in there.' Drop the link in the chat: stringfestdata.gumroad.com/l/mxlais. One clear ask, then move to the thank-you slide. Do not over-apologize for selling, it is a fair ten-dollar offer.</a:t>
             </a:r>
             <a:endParaRPr lang="en-US" dirty="0"/>
           </a:p>
@@ -2221,7 +2399,7 @@
                 <a:ea typeface="Arial" pitchFamily="34" charset="-122"/>
                 <a:cs typeface="Arial" pitchFamily="34" charset="-120"/>
               </a:rPr>
-              <a:t>A one-hour, hands-on look at what AI can — and can't — do inside Excel.</a:t>
+              <a:t>A one-hour, hands-on look at what AI can (and can't) do inside Excel.</a:t>
             </a:r>
             <a:endParaRPr lang="en-US" sz="1800" dirty="0"/>
           </a:p>
@@ -3077,7 +3255,7 @@
                 <a:ea typeface="Arial" pitchFamily="34" charset="-122"/>
                 <a:cs typeface="Arial" pitchFamily="34" charset="-120"/>
               </a:rPr>
-              <a:t>stringfestanalytics.com  ·  AI for Excel Demo Day  ·  10 / 14</a:t>
+              <a:t>stringfestanalytics.com  ·  AI for Excel Demo Day  ·  10 / 16</a:t>
             </a:r>
             <a:endParaRPr lang="en-US" sz="900" dirty="0"/>
           </a:p>
@@ -3187,7 +3365,7 @@
                 <a:ea typeface="Arial" pitchFamily="34" charset="-122"/>
                 <a:cs typeface="Arial" pitchFamily="34" charset="-120"/>
               </a:rPr>
-              <a:t>Same dataset. Same tool. The prompt is the difference.</a:t>
+              <a:t>The recipe, fully applied: all four ingredients in one clean sentence.</a:t>
             </a:r>
             <a:endParaRPr lang="en-US" sz="1300" dirty="0"/>
           </a:p>
@@ -3474,21 +3652,18 @@
               <a:buNone/>
             </a:pPr>
             <a:r>
-              <a:rPr lang="en-US" sz="1200" i="1" dirty="0">
-                <a:solidFill>
-                  <a:srgbClr val="1F2120"/>
+              <a:rPr lang="en-US" sz="1050" b="1" spc="100" dirty="0">
+                <a:solidFill>
+                  <a:srgbClr val="CF3338"/>
                 </a:solidFill>
                 <a:latin typeface="Arial" pitchFamily="34" charset="0"/>
                 <a:ea typeface="Arial" pitchFamily="34" charset="-122"/>
                 <a:cs typeface="Arial" pitchFamily="34" charset="-120"/>
               </a:rPr>
-              <a:t>“From the wholesale-customers table, </a:t>
-            </a:r>
-            <a:pPr indent="0" marL="0">
-              <a:buNone/>
-            </a:pPr>
-            <a:r>
-              <a:rPr lang="en-US" sz="1200" b="1" i="1" dirty="0">
+              <a:t xml:space="preserve">CONTEXT  </a:t>
+            </a:r>
+            <a:r>
+              <a:rPr lang="en-US" sz="1400" i="1" dirty="0">
                 <a:solidFill>
                   <a:srgbClr val="1F2120"/>
                 </a:solidFill>
@@ -3496,27 +3671,21 @@
                 <a:ea typeface="Arial" pitchFamily="34" charset="-122"/>
                 <a:cs typeface="Arial" pitchFamily="34" charset="-120"/>
               </a:rPr>
-              <a:t>treat Channel 1 as HoReCa and 2 as Retail. </a:t>
-            </a:r>
-            <a:pPr indent="0" marL="0">
-              <a:buNone/>
-            </a:pPr>
-            <a:r>
-              <a:rPr lang="en-US" sz="1200" i="1" dirty="0">
-                <a:solidFill>
-                  <a:srgbClr val="1F2120"/>
+              <a:t xml:space="preserve">For a channel-strategy review, </a:t>
+            </a:r>
+            <a:r>
+              <a:rPr lang="en-US" sz="1050" b="1" spc="100" dirty="0">
+                <a:solidFill>
+                  <a:srgbClr val="CF3338"/>
                 </a:solidFill>
                 <a:latin typeface="Arial" pitchFamily="34" charset="0"/>
                 <a:ea typeface="Arial" pitchFamily="34" charset="-122"/>
                 <a:cs typeface="Arial" pitchFamily="34" charset="-120"/>
               </a:rPr>
-              <a:t>Compute total annual spend per customer as the sum of Fresh, Milk, Grocery, Frozen, Detergents_Paper, and Delicassen. </a:t>
-            </a:r>
-            <a:pPr indent="0" marL="0">
-              <a:buNone/>
-            </a:pPr>
-            <a:r>
-              <a:rPr lang="en-US" sz="1200" i="1" dirty="0">
+              <a:t xml:space="preserve">GOAL  </a:t>
+            </a:r>
+            <a:r>
+              <a:rPr lang="en-US" sz="1400" i="1" dirty="0">
                 <a:solidFill>
                   <a:srgbClr val="1F2120"/>
                 </a:solidFill>
@@ -3524,46 +3693,113 @@
                 <a:ea typeface="Arial" pitchFamily="34" charset="-122"/>
                 <a:cs typeface="Arial" pitchFamily="34" charset="-120"/>
               </a:rPr>
-              <a:t>Return the sum of total spend grouped by Channel as a two-row table with whole-dollar values.”</a:t>
-            </a:r>
-            <a:endParaRPr lang="en-US" sz="1200" dirty="0"/>
-          </a:p>
-        </p:txBody>
-      </p:sp>
-      <p:sp>
-        <p:nvSpPr>
-          <p:cNvPr id="13" name="Text 11"/>
-          <p:cNvSpPr/>
-          <p:nvPr/>
-        </p:nvSpPr>
-        <p:spPr>
-          <a:xfrm>
-            <a:off x="365760" y="4800600"/>
-            <a:ext cx="6400800" cy="274320"/>
-          </a:xfrm>
-          <a:prstGeom prst="rect">
-            <a:avLst/>
-          </a:prstGeom>
-          <a:noFill/>
-          <a:ln/>
-        </p:spPr>
-        <p:txBody>
-          <a:bodyPr wrap="square" lIns="0" tIns="0" rIns="0" bIns="0" rtlCol="0" anchor="ctr"/>
-          <a:lstStyle/>
-          <a:p>
-            <a:pPr indent="0" marL="0">
-              <a:buNone/>
-            </a:pPr>
-            <a:r>
-              <a:rPr lang="en-US" sz="900" dirty="0">
-                <a:solidFill>
-                  <a:srgbClr val="707070"/>
+              <a:t xml:space="preserve">show total Spend by Channel </a:t>
+            </a:r>
+            <a:r>
+              <a:rPr lang="en-US" sz="1050" b="1" spc="100" dirty="0">
+                <a:solidFill>
+                  <a:srgbClr val="CF3338"/>
                 </a:solidFill>
                 <a:latin typeface="Arial" pitchFamily="34" charset="0"/>
                 <a:ea typeface="Arial" pitchFamily="34" charset="-122"/>
                 <a:cs typeface="Arial" pitchFamily="34" charset="-120"/>
               </a:rPr>
-              <a:t>stringfestanalytics.com  ·  AI for Excel Demo Day  ·  11 / 14</a:t>
+              <a:t xml:space="preserve">SOURCE  </a:t>
+            </a:r>
+            <a:r>
+              <a:rPr lang="en-US" sz="1400" i="1" dirty="0">
+                <a:solidFill>
+                  <a:srgbClr val="1F2120"/>
+                </a:solidFill>
+                <a:latin typeface="Arial" pitchFamily="34" charset="0"/>
+                <a:ea typeface="Arial" pitchFamily="34" charset="-122"/>
+                <a:cs typeface="Arial" pitchFamily="34" charset="-120"/>
+              </a:rPr>
+              <a:t xml:space="preserve">from the cleaned wholesale table </a:t>
+            </a:r>
+            <a:r>
+              <a:rPr lang="en-US" sz="1050" b="1" spc="100" dirty="0">
+                <a:solidFill>
+                  <a:srgbClr val="CF3338"/>
+                </a:solidFill>
+                <a:latin typeface="Arial" pitchFamily="34" charset="0"/>
+                <a:ea typeface="Arial" pitchFamily="34" charset="-122"/>
+                <a:cs typeface="Arial" pitchFamily="34" charset="-120"/>
+              </a:rPr>
+              <a:t xml:space="preserve">EXPECTATIONS  </a:t>
+            </a:r>
+            <a:r>
+              <a:rPr lang="en-US" sz="1400" i="1" dirty="0">
+                <a:solidFill>
+                  <a:srgbClr val="1F2120"/>
+                </a:solidFill>
+                <a:latin typeface="Arial" pitchFamily="34" charset="0"/>
+                <a:ea typeface="Arial" pitchFamily="34" charset="-122"/>
+                <a:cs typeface="Arial" pitchFamily="34" charset="-120"/>
+              </a:rPr>
+              <a:t xml:space="preserve">as a two-row table, whole dollars, largest first. </a:t>
+            </a:r>
+            <a:endParaRPr lang="en-US" sz="1400" dirty="0"/>
+          </a:p>
+          <a:p>
+            <a:pPr indent="0" marL="0">
+              <a:buNone/>
+            </a:pPr>
+            <a:endParaRPr lang="en-US" sz="700" dirty="0"/>
+          </a:p>
+          <a:p>
+            <a:pPr indent="0" marL="0">
+              <a:buNone/>
+            </a:pPr>
+            <a:r>
+              <a:rPr lang="en-US" sz="1150" dirty="0">
+                <a:solidFill>
+                  <a:srgbClr val="707070"/>
+                </a:solidFill>
+                <a:latin typeface="Arial" pitchFamily="34" charset="0"/>
+                <a:ea typeface="Arial" pitchFamily="34" charset="-122"/>
+                <a:cs typeface="Arial" pitchFamily="34" charset="-120"/>
+              </a:rPr>
+              <a:t>All four ingredients, one sentence. On the next slide: which ones you can drop once you're fluent.</a:t>
+            </a:r>
+            <a:endParaRPr lang="en-US" sz="1150" dirty="0"/>
+          </a:p>
+        </p:txBody>
+      </p:sp>
+      <p:sp>
+        <p:nvSpPr>
+          <p:cNvPr id="13" name="Text 11"/>
+          <p:cNvSpPr/>
+          <p:nvPr/>
+        </p:nvSpPr>
+        <p:spPr>
+          <a:xfrm>
+            <a:off x="365760" y="4800600"/>
+            <a:ext cx="6400800" cy="274320"/>
+          </a:xfrm>
+          <a:prstGeom prst="rect">
+            <a:avLst/>
+          </a:prstGeom>
+          <a:noFill/>
+          <a:ln/>
+        </p:spPr>
+        <p:txBody>
+          <a:bodyPr wrap="square" lIns="0" tIns="0" rIns="0" bIns="0" rtlCol="0" anchor="ctr"/>
+          <a:lstStyle/>
+          <a:p>
+            <a:pPr indent="0" marL="0">
+              <a:buNone/>
+            </a:pPr>
+            <a:r>
+              <a:rPr lang="en-US" sz="900" dirty="0">
+                <a:solidFill>
+                  <a:srgbClr val="707070"/>
+                </a:solidFill>
+                <a:latin typeface="Arial" pitchFamily="34" charset="0"/>
+                <a:ea typeface="Arial" pitchFamily="34" charset="-122"/>
+                <a:cs typeface="Arial" pitchFamily="34" charset="-120"/>
+              </a:rPr>
+              <a:t>stringfestanalytics.com  ·  AI for Excel Demo Day  ·  11 / 16</a:t>
             </a:r>
             <a:endParaRPr lang="en-US" sz="900" dirty="0"/>
           </a:p>
@@ -4505,7 +4741,7 @@
                 <a:ea typeface="Arial Black" pitchFamily="34" charset="-122"/>
                 <a:cs typeface="Arial Black" pitchFamily="34" charset="-120"/>
               </a:rPr>
-              <a:t>Keep following — we'll get to all of it. Today was just the doorway.</a:t>
+              <a:t>Keep following. We'll get to all of it. Today was just the doorway.</a:t>
             </a:r>
             <a:endParaRPr lang="en-US" sz="1400" dirty="0"/>
           </a:p>
@@ -4544,7 +4780,7 @@
                 <a:ea typeface="Arial" pitchFamily="34" charset="-122"/>
                 <a:cs typeface="Arial" pitchFamily="34" charset="-120"/>
               </a:rPr>
-              <a:t>stringfestanalytics.com  ·  AI for Excel Demo Day  ·  12 / 14</a:t>
+              <a:t>stringfestanalytics.com  ·  AI for Excel Demo Day  ·  13 / 16</a:t>
             </a:r>
             <a:endParaRPr lang="en-US" sz="900" dirty="0"/>
           </a:p>
@@ -4615,7 +4851,7 @@
                 <a:ea typeface="Arial Black" pitchFamily="34" charset="-122"/>
                 <a:cs typeface="Arial Black" pitchFamily="34" charset="-120"/>
               </a:rPr>
-              <a:t>Before the next AI thing — nail the foundation</a:t>
+              <a:t>Before the next AI thing, nail the foundation</a:t>
             </a:r>
             <a:endParaRPr lang="en-US" sz="2600" dirty="0"/>
           </a:p>
@@ -5161,7 +5397,7 @@
                 <a:ea typeface="Arial" pitchFamily="34" charset="-122"/>
                 <a:cs typeface="Arial" pitchFamily="34" charset="-120"/>
               </a:rPr>
-              <a:t>George Mount  —  </a:t>
+              <a:t>George Mount  ·  </a:t>
             </a:r>
             <a:pPr indent="0" marL="0">
               <a:buNone/>
@@ -5223,9 +5459,815 @@
                   </a:extLst>
                 </a:hlinkClick>
               </a:rPr>
-              <a:t>stringfestanalytics.com/maxl  —  Modern Data Analytics in Excel</a:t>
+              <a:t>stringfestanalytics.com/maxl  ·  Modern Data Analytics in Excel</a:t>
             </a:r>
             <a:endParaRPr lang="en-US" sz="1400" dirty="0"/>
+          </a:p>
+        </p:txBody>
+      </p:sp>
+    </p:spTree>
+  </p:cSld>
+  <p:clrMapOvr>
+    <a:masterClrMapping/>
+  </p:clrMapOvr>
+</p:sld>
+</file>
+
+<file path=ppt/slides/slide15.xml><?xml version="1.0" encoding="utf-8"?>
+<p:sld xmlns:a="http://schemas.openxmlformats.org/drawingml/2006/main" xmlns:r="http://schemas.openxmlformats.org/officeDocument/2006/relationships" xmlns:p="http://schemas.openxmlformats.org/presentationml/2006/main">
+  <p:cSld name="Slide 12">
+    <p:bg>
+      <p:bgPr>
+        <a:solidFill>
+          <a:srgbClr val="EEECE1"/>
+        </a:solidFill>
+      </p:bgPr>
+    </p:bg>
+    <p:spTree>
+      <p:nvGrpSpPr>
+        <p:cNvPr id="1" name=""/>
+        <p:cNvGrpSpPr/>
+        <p:nvPr/>
+      </p:nvGrpSpPr>
+      <p:grpSpPr>
+        <a:xfrm>
+          <a:off x="0" y="0"/>
+          <a:ext cx="0" cy="0"/>
+          <a:chOff x="0" y="0"/>
+          <a:chExt cx="0" cy="0"/>
+        </a:xfrm>
+      </p:grpSpPr>
+      <p:sp>
+        <p:nvSpPr>
+          <p:cNvPr id="2" name="Title"/>
+          <p:cNvSpPr/>
+          <p:nvPr/>
+        </p:nvSpPr>
+        <p:spPr>
+          <a:xfrm>
+            <a:off x="457200" y="365760"/>
+            <a:ext cx="8229600" cy="640080"/>
+          </a:xfrm>
+          <a:prstGeom prst="rect">
+            <a:avLst/>
+          </a:prstGeom>
+          <a:noFill/>
+          <a:ln/>
+        </p:spPr>
+        <p:txBody>
+          <a:bodyPr wrap="square" lIns="0" tIns="0" rIns="0" bIns="0" rtlCol="0" anchor="ctr"/>
+          <a:lstStyle/>
+          <a:p>
+            <a:pPr indent="0" marL="0">
+              <a:buNone/>
+            </a:pPr>
+            <a:r>
+              <a:rPr lang="en-US" sz="3200" b="1" dirty="0">
+                <a:solidFill>
+                  <a:srgbClr val="1F2120"/>
+                </a:solidFill>
+                <a:latin typeface="Arial Black" pitchFamily="34" charset="0"/>
+                <a:ea typeface="Arial Black" pitchFamily="34" charset="-122"/>
+                <a:cs typeface="Arial Black" pitchFamily="34" charset="-120"/>
+              </a:rPr>
+              <a:t>From recipe to fluency</a:t>
+            </a:r>
+            <a:endParaRPr lang="en-US" sz="3200" dirty="0"/>
+          </a:p>
+        </p:txBody>
+      </p:sp>
+      <p:sp>
+        <p:nvSpPr>
+          <p:cNvPr id="3" name="Subtitle"/>
+          <p:cNvSpPr/>
+          <p:nvPr/>
+        </p:nvSpPr>
+        <p:spPr>
+          <a:xfrm>
+            <a:off x="457200" y="960120"/>
+            <a:ext cx="8229600" cy="365760"/>
+          </a:xfrm>
+          <a:prstGeom prst="rect">
+            <a:avLst/>
+          </a:prstGeom>
+          <a:noFill/>
+          <a:ln/>
+        </p:spPr>
+        <p:txBody>
+          <a:bodyPr wrap="square" lIns="0" tIns="0" rIns="0" bIns="0" rtlCol="0" anchor="ctr"/>
+          <a:lstStyle/>
+          <a:p>
+            <a:pPr indent="0" marL="0">
+              <a:buNone/>
+            </a:pPr>
+            <a:r>
+              <a:rPr lang="en-US" sz="1300" i="1" dirty="0">
+                <a:solidFill>
+                  <a:srgbClr val="707070"/>
+                </a:solidFill>
+                <a:latin typeface="Arial" pitchFamily="34" charset="0"/>
+                <a:ea typeface="Arial" pitchFamily="34" charset="-122"/>
+                <a:cs typeface="Arial" pitchFamily="34" charset="-120"/>
+              </a:rPr>
+              <a:t>GCSE is training wheels. The cleaner your data, the fewer ingredients you have to spell out.</a:t>
+            </a:r>
+            <a:endParaRPr lang="en-US" sz="1300" dirty="0"/>
+          </a:p>
+        </p:txBody>
+      </p:sp>
+      <p:sp>
+        <p:nvSpPr>
+          <p:cNvPr id="4" name="Panel"/>
+          <p:cNvSpPr/>
+          <p:nvPr/>
+        </p:nvSpPr>
+        <p:spPr>
+          <a:xfrm>
+            <a:off x="457200" y="1417320"/>
+            <a:ext cx="8229600" cy="2148840"/>
+          </a:xfrm>
+          <a:prstGeom prst="rect">
+            <a:avLst/>
+          </a:prstGeom>
+          <a:solidFill>
+            <a:srgbClr val="FFFFFF"/>
+          </a:solidFill>
+          <a:ln w="15240">
+            <a:solidFill>
+              <a:srgbClr val="707070"/>
+            </a:solidFill>
+            <a:prstDash val="solid"/>
+          </a:ln>
+        </p:spPr>
+      </p:sp>
+      <p:sp>
+        <p:nvSpPr>
+          <p:cNvPr id="5" name="Tab"/>
+          <p:cNvSpPr/>
+          <p:nvPr/>
+        </p:nvSpPr>
+        <p:spPr>
+          <a:xfrm>
+            <a:off x="457200" y="1417320"/>
+            <a:ext cx="1097280" cy="2148840"/>
+          </a:xfrm>
+          <a:prstGeom prst="rect">
+            <a:avLst/>
+          </a:prstGeom>
+          <a:solidFill>
+            <a:srgbClr val="1F2120"/>
+          </a:solidFill>
+          <a:ln w="12700">
+            <a:solidFill>
+              <a:srgbClr val="1F2120"/>
+            </a:solidFill>
+            <a:prstDash val="solid"/>
+          </a:ln>
+        </p:spPr>
+      </p:sp>
+      <p:sp>
+        <p:nvSpPr>
+          <p:cNvPr id="6" name="TabLabel"/>
+          <p:cNvSpPr/>
+          <p:nvPr/>
+        </p:nvSpPr>
+        <p:spPr>
+          <a:xfrm>
+            <a:off x="457200" y="1417320"/>
+            <a:ext cx="1097280" cy="2148840"/>
+          </a:xfrm>
+          <a:prstGeom prst="rect">
+            <a:avLst/>
+          </a:prstGeom>
+          <a:noFill/>
+          <a:ln/>
+        </p:spPr>
+        <p:txBody>
+          <a:bodyPr wrap="square" lIns="0" tIns="0" rIns="0" bIns="0" rtlCol="0" anchor="ctr"/>
+          <a:lstStyle/>
+          <a:p>
+            <a:pPr algn="ctr" indent="0" marL="0">
+              <a:buNone/>
+            </a:pPr>
+            <a:r>
+              <a:rPr lang="en-US" sz="1500" b="1" spc="300" kern="0" dirty="0">
+                <a:solidFill>
+                  <a:srgbClr val="FFFFFF"/>
+                </a:solidFill>
+                <a:latin typeface="Arial Black" pitchFamily="34" charset="0"/>
+                <a:ea typeface="Arial Black" pitchFamily="34" charset="-122"/>
+                <a:cs typeface="Arial Black" pitchFamily="34" charset="-120"/>
+              </a:rPr>
+              <a:t>FLUENT</a:t>
+            </a:r>
+            <a:endParaRPr lang="en-US" sz="1500" dirty="0"/>
+          </a:p>
+        </p:txBody>
+      </p:sp>
+      <p:sp>
+        <p:nvSpPr>
+          <p:cNvPr id="7" name="Prompts"/>
+          <p:cNvSpPr/>
+          <p:nvPr/>
+        </p:nvSpPr>
+        <p:spPr>
+          <a:xfrm>
+            <a:off x="1737360" y="1508760"/>
+            <a:ext cx="6766560" cy="1965960"/>
+          </a:xfrm>
+          <a:prstGeom prst="rect">
+            <a:avLst/>
+          </a:prstGeom>
+          <a:noFill/>
+          <a:ln/>
+        </p:spPr>
+        <p:txBody>
+          <a:bodyPr wrap="square" lIns="0" tIns="0" rIns="0" bIns="0" rtlCol="0" anchor="ctr"/>
+          <a:lstStyle/>
+          <a:p>
+            <a:pPr indent="-274320" marL="274320" marR="91440">
+              <a:lnSpc>
+                <a:spcPct val="100000"/>
+              </a:lnSpc>
+              <a:spcAft>
+                <a:spcPts val="800"/>
+              </a:spcAft>
+              <a:buFont typeface="Arial" pitchFamily="34" charset="0"/>
+              <a:buChar char="→"/>
+            </a:pPr>
+            <a:r>
+              <a:rPr lang="en-US" sz="1300" i="1" dirty="0">
+                <a:solidFill>
+                  <a:srgbClr val="1F2120"/>
+                </a:solidFill>
+                <a:latin typeface="Arial" pitchFamily="34" charset="0"/>
+                <a:ea typeface="Arial" pitchFamily="34" charset="-122"/>
+                <a:cs typeface="Arial" pitchFamily="34" charset="-120"/>
+              </a:rPr>
+              <a:t>“Break that down by Category within each Channel. Which one drives the gap between HoReCa and Retail?”</a:t>
+            </a:r>
+          </a:p>
+          <a:p>
+            <a:pPr indent="-274320" marL="274320" marR="91440">
+              <a:lnSpc>
+                <a:spcPct val="100000"/>
+              </a:lnSpc>
+              <a:spcAft>
+                <a:spcPts val="800"/>
+              </a:spcAft>
+              <a:buFont typeface="Arial" pitchFamily="34" charset="0"/>
+              <a:buChar char="→"/>
+            </a:pPr>
+            <a:r>
+              <a:rPr lang="en-US" sz="1300" i="1" dirty="0">
+                <a:solidFill>
+                  <a:srgbClr val="1F2120"/>
+                </a:solidFill>
+                <a:latin typeface="Arial" pitchFamily="34" charset="0"/>
+                <a:ea typeface="Arial" pitchFamily="34" charset="-122"/>
+                <a:cs typeface="Arial" pitchFamily="34" charset="-120"/>
+              </a:rPr>
+              <a:t>“Rank Regions by total Spend and flag the top Category in each, as a short table for a slide.”</a:t>
+            </a:r>
+          </a:p>
+          <a:p>
+            <a:pPr indent="-274320" marL="274320" marR="91440">
+              <a:lnSpc>
+                <a:spcPct val="100000"/>
+              </a:lnSpc>
+              <a:spcAft>
+                <a:spcPts val="1100"/>
+              </a:spcAft>
+              <a:buFont typeface="Arial" pitchFamily="34" charset="0"/>
+              <a:buChar char="→"/>
+            </a:pPr>
+            <a:r>
+              <a:rPr lang="en-US" sz="1300" i="1" dirty="0">
+                <a:solidFill>
+                  <a:srgbClr val="1F2120"/>
+                </a:solidFill>
+                <a:latin typeface="Arial" pitchFamily="34" charset="0"/>
+                <a:ea typeface="Arial" pitchFamily="34" charset="-122"/>
+                <a:cs typeface="Arial" pitchFamily="34" charset="-120"/>
+              </a:rPr>
+              <a:t>“Which Channel over-indexes on Fresh versus Grocery?”</a:t>
+            </a:r>
+          </a:p>
+          <a:p>
+            <a:pPr indent="0" marL="0">
+              <a:buNone/>
+            </a:pPr>
+            <a:r>
+              <a:rPr lang="en-US" sz="1100" dirty="0">
+                <a:solidFill>
+                  <a:srgbClr val="707070"/>
+                </a:solidFill>
+                <a:latin typeface="Arial" pitchFamily="34" charset="0"/>
+                <a:ea typeface="Arial" pitchFamily="34" charset="-122"/>
+                <a:cs typeface="Arial" pitchFamily="34" charset="-120"/>
+              </a:rPr>
+              <a:t>Each one is a follow-up. Notice what's gone: no encodings, no column lists. The clean table carries that, so you can just think out loud.</a:t>
+            </a:r>
+            <a:endParaRPr lang="en-US" sz="1100" dirty="0"/>
+          </a:p>
+        </p:txBody>
+      </p:sp>
+      <p:sp>
+        <p:nvSpPr>
+          <p:cNvPr id="8" name="ClosingBand"/>
+          <p:cNvSpPr/>
+          <p:nvPr/>
+        </p:nvSpPr>
+        <p:spPr>
+          <a:xfrm>
+            <a:off x="457200" y="3703320"/>
+            <a:ext cx="8229600" cy="868680"/>
+          </a:xfrm>
+          <a:prstGeom prst="rect">
+            <a:avLst/>
+          </a:prstGeom>
+          <a:solidFill>
+            <a:srgbClr val="CF3338"/>
+          </a:solidFill>
+          <a:ln/>
+        </p:spPr>
+        <p:txBody>
+          <a:bodyPr wrap="square" lIns="137160" tIns="45720" rIns="137160" bIns="45720" rtlCol="0" anchor="ctr"/>
+          <a:lstStyle/>
+          <a:p>
+            <a:pPr algn="ctr" indent="0" marL="0">
+              <a:buNone/>
+            </a:pPr>
+            <a:r>
+              <a:rPr lang="en-US" sz="1300" b="1" i="1" dirty="0">
+                <a:solidFill>
+                  <a:srgbClr val="FFFFFF"/>
+                </a:solidFill>
+                <a:latin typeface="Arial" pitchFamily="34" charset="0"/>
+                <a:ea typeface="Arial" pitchFamily="34" charset="-122"/>
+                <a:cs typeface="Arial" pitchFamily="34" charset="-120"/>
+              </a:rPr>
+              <a:t>Prompting is like learning a language: drill every rule at first, then just talk. Reach back for Goal · Context · Source · Expectations whenever an answer comes back wrong.</a:t>
+            </a:r>
+            <a:endParaRPr lang="en-US" sz="1300" dirty="0"/>
+          </a:p>
+        </p:txBody>
+      </p:sp>
+      <p:sp>
+        <p:nvSpPr>
+          <p:cNvPr id="9" name="Footer"/>
+          <p:cNvSpPr/>
+          <p:nvPr/>
+        </p:nvSpPr>
+        <p:spPr>
+          <a:xfrm>
+            <a:off x="365760" y="4800600"/>
+            <a:ext cx="6400800" cy="274320"/>
+          </a:xfrm>
+          <a:prstGeom prst="rect">
+            <a:avLst/>
+          </a:prstGeom>
+          <a:noFill/>
+          <a:ln/>
+        </p:spPr>
+        <p:txBody>
+          <a:bodyPr wrap="square" lIns="0" tIns="0" rIns="0" bIns="0" rtlCol="0" anchor="ctr"/>
+          <a:lstStyle/>
+          <a:p>
+            <a:pPr indent="0" marL="0">
+              <a:buNone/>
+            </a:pPr>
+            <a:r>
+              <a:rPr lang="en-US" sz="900" dirty="0">
+                <a:solidFill>
+                  <a:srgbClr val="707070"/>
+                </a:solidFill>
+                <a:latin typeface="Arial" pitchFamily="34" charset="0"/>
+                <a:ea typeface="Arial" pitchFamily="34" charset="-122"/>
+                <a:cs typeface="Arial" pitchFamily="34" charset="-120"/>
+              </a:rPr>
+              <a:t>stringfestanalytics.com  ·  AI for Excel Demo Day  ·  12 / 16</a:t>
+            </a:r>
+            <a:endParaRPr lang="en-US" sz="900" dirty="0"/>
+          </a:p>
+        </p:txBody>
+      </p:sp>
+    </p:spTree>
+  </p:cSld>
+  <p:clrMapOvr>
+    <a:masterClrMapping/>
+  </p:clrMapOvr>
+</p:sld>
+</file>
+
+<file path=ppt/slides/slide16.xml><?xml version="1.0" encoding="utf-8"?>
+<p:sld xmlns:a="http://schemas.openxmlformats.org/drawingml/2006/main" xmlns:r="http://schemas.openxmlformats.org/officeDocument/2006/relationships" xmlns:p="http://schemas.openxmlformats.org/presentationml/2006/main">
+  <p:cSld name="Slide 14">
+    <p:bg>
+      <p:bgPr>
+        <a:solidFill>
+          <a:srgbClr val="9C3526"/>
+        </a:solidFill>
+      </p:bgPr>
+    </p:bg>
+    <p:spTree>
+      <p:nvGrpSpPr>
+        <p:cNvPr id="1" name=""/>
+        <p:cNvGrpSpPr/>
+        <p:nvPr/>
+      </p:nvGrpSpPr>
+      <p:grpSpPr>
+        <a:xfrm>
+          <a:off x="0" y="0"/>
+          <a:ext cx="0" cy="0"/>
+          <a:chOff x="0" y="0"/>
+          <a:chExt cx="0" cy="0"/>
+        </a:xfrm>
+      </p:grpSpPr>
+      <p:sp>
+        <p:nvSpPr>
+          <p:cNvPr id="2" name="Kicker"/>
+          <p:cNvSpPr/>
+          <p:nvPr/>
+        </p:nvSpPr>
+        <p:spPr>
+          <a:xfrm>
+            <a:off x="457200" y="411480"/>
+            <a:ext cx="4800600" cy="300000"/>
+          </a:xfrm>
+          <a:prstGeom prst="rect">
+            <a:avLst/>
+          </a:prstGeom>
+          <a:noFill/>
+          <a:ln/>
+        </p:spPr>
+        <p:txBody>
+          <a:bodyPr wrap="square" lIns="0" tIns="0" rIns="0" bIns="0" rtlCol="0" anchor="ctr"/>
+          <a:lstStyle/>
+          <a:p>
+            <a:pPr indent="0" marL="0">
+              <a:buNone/>
+            </a:pPr>
+            <a:r>
+              <a:rPr lang="en-US" sz="1300" b="1" spc="400" kern="0" dirty="0">
+                <a:solidFill>
+                  <a:srgbClr val="E6A93C"/>
+                </a:solidFill>
+                <a:latin typeface="Arial Black" pitchFamily="34" charset="0"/>
+                <a:ea typeface="Arial Black" pitchFamily="34" charset="-122"/>
+                <a:cs typeface="Arial Black" pitchFamily="34" charset="-120"/>
+              </a:rPr>
+              <a:t>WANT THE RECORDING?</a:t>
+            </a:r>
+            <a:endParaRPr lang="en-US" sz="1300" dirty="0"/>
+          </a:p>
+        </p:txBody>
+      </p:sp>
+      <p:sp>
+        <p:nvSpPr>
+          <p:cNvPr id="3" name="Headline"/>
+          <p:cNvSpPr/>
+          <p:nvPr/>
+        </p:nvSpPr>
+        <p:spPr>
+          <a:xfrm>
+            <a:off x="457200" y="800100"/>
+            <a:ext cx="4800600" cy="1280160"/>
+          </a:xfrm>
+          <a:prstGeom prst="rect">
+            <a:avLst/>
+          </a:prstGeom>
+          <a:noFill/>
+          <a:ln/>
+        </p:spPr>
+        <p:txBody>
+          <a:bodyPr wrap="square" lIns="0" tIns="0" rIns="0" bIns="0" rtlCol="0" anchor="ctr"/>
+          <a:lstStyle/>
+          <a:p>
+            <a:pPr indent="0" marL="0">
+              <a:lnSpc>
+                <a:spcPct val="98000"/>
+              </a:lnSpc>
+              <a:buNone/>
+            </a:pPr>
+            <a:r>
+              <a:rPr lang="en-US" sz="3600" b="1" dirty="0">
+                <a:solidFill>
+                  <a:srgbClr val="EFE3C8"/>
+                </a:solidFill>
+                <a:latin typeface="Arial Black" pitchFamily="34" charset="0"/>
+                <a:ea typeface="Arial Black" pitchFamily="34" charset="-122"/>
+                <a:cs typeface="Arial Black" pitchFamily="34" charset="-120"/>
+              </a:rPr>
+              <a:t>THE MODERN</a:t>
+            </a:r>
+          </a:p>
+          <a:p>
+            <a:pPr indent="0" marL="0">
+              <a:lnSpc>
+                <a:spcPct val="98000"/>
+              </a:lnSpc>
+              <a:buNone/>
+            </a:pPr>
+            <a:r>
+              <a:rPr lang="en-US" sz="3600" b="1" dirty="0">
+                <a:solidFill>
+                  <a:srgbClr val="E6A93C"/>
+                </a:solidFill>
+                <a:latin typeface="Arial Black" pitchFamily="34" charset="0"/>
+                <a:ea typeface="Arial Black" pitchFamily="34" charset="-122"/>
+                <a:cs typeface="Arial Black" pitchFamily="34" charset="-120"/>
+              </a:rPr>
+              <a:t>EXCEL AI STACK</a:t>
+            </a:r>
+            <a:endParaRPr lang="en-US" sz="3600" dirty="0"/>
+          </a:p>
+        </p:txBody>
+      </p:sp>
+      <p:sp>
+        <p:nvSpPr>
+          <p:cNvPr id="4" name="Subhead"/>
+          <p:cNvSpPr/>
+          <p:nvPr/>
+        </p:nvSpPr>
+        <p:spPr>
+          <a:xfrm>
+            <a:off x="457200" y="2118360"/>
+            <a:ext cx="4663440" cy="548640"/>
+          </a:xfrm>
+          <a:prstGeom prst="rect">
+            <a:avLst/>
+          </a:prstGeom>
+          <a:noFill/>
+          <a:ln/>
+        </p:spPr>
+        <p:txBody>
+          <a:bodyPr wrap="square" lIns="0" tIns="0" rIns="0" bIns="0" rtlCol="0" anchor="ctr"/>
+          <a:lstStyle/>
+          <a:p>
+            <a:pPr indent="0" marL="0">
+              <a:buNone/>
+            </a:pPr>
+            <a:r>
+              <a:rPr lang="en-US" sz="1400" dirty="0">
+                <a:solidFill>
+                  <a:srgbClr val="EFE3C8"/>
+                </a:solidFill>
+                <a:latin typeface="Arial" pitchFamily="34" charset="0"/>
+                <a:ea typeface="Arial" pitchFamily="34" charset="-122"/>
+                <a:cs typeface="Arial" pitchFamily="34" charset="-120"/>
+              </a:rPr>
+              <a:t>Today's session was recorded. It lives in the membership, with every other workshop.</a:t>
+            </a:r>
+            <a:endParaRPr lang="en-US" sz="1400" dirty="0"/>
+          </a:p>
+        </p:txBody>
+      </p:sp>
+      <p:sp>
+        <p:nvSpPr>
+          <p:cNvPr id="5" name="Values"/>
+          <p:cNvSpPr/>
+          <p:nvPr/>
+        </p:nvSpPr>
+        <p:spPr>
+          <a:xfrm>
+            <a:off x="457200" y="2773680"/>
+            <a:ext cx="4663440" cy="1188720"/>
+          </a:xfrm>
+          <a:prstGeom prst="rect">
+            <a:avLst/>
+          </a:prstGeom>
+          <a:noFill/>
+          <a:ln/>
+        </p:spPr>
+        <p:txBody>
+          <a:bodyPr wrap="square" lIns="0" tIns="0" rIns="0" bIns="0" rtlCol="0" anchor="ctr"/>
+          <a:lstStyle/>
+          <a:p>
+            <a:pPr indent="-274320" marL="274320">
+              <a:spcAft>
+                <a:spcPts val="700"/>
+              </a:spcAft>
+              <a:buFont typeface="Arial" pitchFamily="34" charset="0"/>
+              <a:buChar char="→"/>
+            </a:pPr>
+            <a:r>
+              <a:rPr lang="en-US" sz="1500" dirty="0">
+                <a:solidFill>
+                  <a:srgbClr val="EFE3C8"/>
+                </a:solidFill>
+                <a:latin typeface="Arial" pitchFamily="34" charset="0"/>
+                <a:ea typeface="Arial" pitchFamily="34" charset="-122"/>
+                <a:cs typeface="Arial" pitchFamily="34" charset="-120"/>
+              </a:rPr>
+              <a:t>Every session recording, including today's</a:t>
+            </a:r>
+          </a:p>
+          <a:p>
+            <a:pPr indent="-274320" marL="274320">
+              <a:spcAft>
+                <a:spcPts val="700"/>
+              </a:spcAft>
+              <a:buFont typeface="Arial" pitchFamily="34" charset="0"/>
+              <a:buChar char="→"/>
+            </a:pPr>
+            <a:r>
+              <a:rPr lang="en-US" sz="1500" dirty="0">
+                <a:solidFill>
+                  <a:srgbClr val="EFE3C8"/>
+                </a:solidFill>
+                <a:latin typeface="Arial" pitchFamily="34" charset="0"/>
+                <a:ea typeface="Arial" pitchFamily="34" charset="-122"/>
+                <a:cs typeface="Arial" pitchFamily="34" charset="-120"/>
+              </a:rPr>
+              <a:t>The full back catalog, ready to binge</a:t>
+            </a:r>
+          </a:p>
+          <a:p>
+            <a:pPr indent="-274320" marL="274320">
+              <a:buFont typeface="Arial" pitchFamily="34" charset="0"/>
+              <a:buChar char="→"/>
+            </a:pPr>
+            <a:r>
+              <a:rPr lang="en-US" sz="1500" dirty="0">
+                <a:solidFill>
+                  <a:srgbClr val="EFE3C8"/>
+                </a:solidFill>
+                <a:latin typeface="Arial" pitchFamily="34" charset="0"/>
+                <a:ea typeface="Arial" pitchFamily="34" charset="-122"/>
+                <a:cs typeface="Arial" pitchFamily="34" charset="-120"/>
+              </a:rPr>
+              <a:t>New workshops as they land</a:t>
+            </a:r>
+          </a:p>
+        </p:txBody>
+      </p:sp>
+      <p:sp>
+        <p:nvSpPr>
+          <p:cNvPr id="6" name="LinkPill">
+            <a:hlinkClick xmlns:a="http://schemas.openxmlformats.org/drawingml/2006/main" xmlns:r="http://schemas.openxmlformats.org/officeDocument/2006/relationships" r:id="rId2"/>
+          </p:cNvPr>
+          <p:cNvSpPr/>
+          <p:nvPr/>
+        </p:nvSpPr>
+        <p:spPr>
+          <a:xfrm>
+            <a:off x="457200" y="4160520"/>
+            <a:ext cx="4663440" cy="566928"/>
+          </a:xfrm>
+          <a:prstGeom prst="roundRect">
+            <a:avLst>
+              <a:gd name="adj" fmla="val 50000"/>
+            </a:avLst>
+          </a:prstGeom>
+          <a:solidFill>
+            <a:srgbClr val="E6A93C"/>
+          </a:solidFill>
+          <a:ln/>
+        </p:spPr>
+        <p:txBody>
+          <a:bodyPr wrap="square" lIns="91440" tIns="0" rIns="91440" bIns="0" rtlCol="0" anchor="ctr"/>
+          <a:lstStyle/>
+          <a:p>
+            <a:pPr algn="ctr" indent="0" marL="0">
+              <a:buNone/>
+            </a:pPr>
+            <a:r>
+              <a:rPr lang="en-US" sz="1400" b="1" dirty="0">
+                <a:solidFill>
+                  <a:srgbClr val="3B2218"/>
+                </a:solidFill>
+                <a:latin typeface="Arial" pitchFamily="34" charset="0"/>
+                <a:ea typeface="Arial" pitchFamily="34" charset="-122"/>
+                <a:cs typeface="Arial" pitchFamily="34" charset="-120"/>
+              </a:rPr>
+              <a:t>stringfestdata.gumroad.com/l/mxlais</a:t>
+            </a:r>
+            <a:endParaRPr lang="en-US" sz="1400" dirty="0"/>
+          </a:p>
+        </p:txBody>
+      </p:sp>
+      <p:sp>
+        <p:nvSpPr>
+          <p:cNvPr id="7" name="PriceCard"/>
+          <p:cNvSpPr/>
+          <p:nvPr/>
+        </p:nvSpPr>
+        <p:spPr>
+          <a:xfrm>
+            <a:off x="5638800" y="1188720"/>
+            <a:ext cx="3048000" cy="2766060"/>
+          </a:xfrm>
+          <a:prstGeom prst="roundRect">
+            <a:avLst>
+              <a:gd name="adj" fmla="val 7000"/>
+            </a:avLst>
+          </a:prstGeom>
+          <a:solidFill>
+            <a:srgbClr val="EFE3C8"/>
+          </a:solidFill>
+          <a:ln w="19050">
+            <a:solidFill>
+              <a:srgbClr val="E6A93C"/>
+            </a:solidFill>
+          </a:ln>
+        </p:spPr>
+        <p:txBody>
+          <a:bodyPr wrap="square" lIns="91440" tIns="91440" rIns="91440" bIns="91440" rtlCol="0" anchor="ctr"/>
+          <a:lstStyle/>
+          <a:p>
+            <a:pPr algn="ctr" indent="0" marL="0">
+              <a:buNone/>
+            </a:pPr>
+            <a:r>
+              <a:rPr lang="en-US" sz="7200" b="1" dirty="0">
+                <a:solidFill>
+                  <a:srgbClr val="9C3526"/>
+                </a:solidFill>
+                <a:latin typeface="Arial Black" pitchFamily="34" charset="0"/>
+                <a:ea typeface="Arial Black" pitchFamily="34" charset="-122"/>
+                <a:cs typeface="Arial Black" pitchFamily="34" charset="-120"/>
+              </a:rPr>
+              <a:t>$10</a:t>
+            </a:r>
+          </a:p>
+          <a:p>
+            <a:pPr algn="ctr" indent="0" marL="0">
+              <a:buNone/>
+            </a:pPr>
+            <a:r>
+              <a:rPr lang="en-US" sz="1900" b="1" spc="200" dirty="0">
+                <a:solidFill>
+                  <a:srgbClr val="3B2218"/>
+                </a:solidFill>
+                <a:latin typeface="Arial" pitchFamily="34" charset="0"/>
+                <a:ea typeface="Arial" pitchFamily="34" charset="-122"/>
+                <a:cs typeface="Arial" pitchFamily="34" charset="-120"/>
+              </a:rPr>
+              <a:t>per month</a:t>
+            </a:r>
+          </a:p>
+          <a:p>
+            <a:pPr algn="ctr" indent="0" marL="0">
+              <a:buNone/>
+            </a:pPr>
+            <a:endParaRPr lang="en-US" sz="700" dirty="0"/>
+          </a:p>
+          <a:p>
+            <a:pPr algn="ctr" indent="0" marL="0">
+              <a:buNone/>
+            </a:pPr>
+            <a:r>
+              <a:rPr lang="en-US" sz="1200" i="1" dirty="0">
+                <a:solidFill>
+                  <a:srgbClr val="6E5742"/>
+                </a:solidFill>
+                <a:latin typeface="Arial" pitchFamily="34" charset="0"/>
+                <a:ea typeface="Arial" pitchFamily="34" charset="-122"/>
+                <a:cs typeface="Arial" pitchFamily="34" charset="-120"/>
+              </a:rPr>
+              <a:t>cancel anytime</a:t>
+            </a:r>
+            <a:endParaRPr lang="en-US" sz="1200" dirty="0"/>
+          </a:p>
+        </p:txBody>
+      </p:sp>
+      <p:sp>
+        <p:nvSpPr>
+          <p:cNvPr id="8" name="Brand"/>
+          <p:cNvSpPr/>
+          <p:nvPr/>
+        </p:nvSpPr>
+        <p:spPr>
+          <a:xfrm>
+            <a:off x="457200" y="4815840"/>
+            <a:ext cx="4663440" cy="246380"/>
+          </a:xfrm>
+          <a:prstGeom prst="rect">
+            <a:avLst/>
+          </a:prstGeom>
+          <a:noFill/>
+          <a:ln/>
+        </p:spPr>
+        <p:txBody>
+          <a:bodyPr wrap="square" lIns="0" tIns="0" rIns="0" bIns="0" rtlCol="0" anchor="ctr"/>
+          <a:lstStyle/>
+          <a:p>
+            <a:pPr indent="0" marL="0">
+              <a:buNone/>
+            </a:pPr>
+            <a:r>
+              <a:rPr lang="en-US" sz="900" dirty="0">
+                <a:solidFill>
+                  <a:srgbClr val="D9A98A"/>
+                </a:solidFill>
+                <a:latin typeface="Arial" pitchFamily="34" charset="0"/>
+                <a:ea typeface="Arial" pitchFamily="34" charset="-122"/>
+                <a:cs typeface="Arial" pitchFamily="34" charset="-120"/>
+              </a:rPr>
+              <a:t>stringfestanalytics.com  ·  AI for Excel Demo Day</a:t>
+            </a:r>
+            <a:endParaRPr lang="en-US" sz="900" dirty="0"/>
           </a:p>
         </p:txBody>
       </p:sp>
@@ -5294,7 +6336,7 @@
                 <a:ea typeface="Arial Black" pitchFamily="34" charset="-122"/>
                 <a:cs typeface="Arial Black" pitchFamily="34" charset="-120"/>
               </a:rPr>
-              <a:t>What this hour is — and isn't</a:t>
+              <a:t>What this hour is (and isn't)</a:t>
             </a:r>
             <a:endParaRPr lang="en-US" sz="3200" dirty="0"/>
           </a:p>
@@ -5723,7 +6765,7 @@
                 <a:ea typeface="Arial" pitchFamily="34" charset="-122"/>
                 <a:cs typeface="Arial" pitchFamily="34" charset="-120"/>
               </a:rPr>
-              <a:t>stringfestanalytics.com  ·  AI for Excel Demo Day  ·  2 / 14</a:t>
+              <a:t>stringfestanalytics.com  ·  AI for Excel Demo Day  ·  2 / 16</a:t>
             </a:r>
             <a:endParaRPr lang="en-US" sz="900" dirty="0"/>
           </a:p>
@@ -9301,7 +10343,7 @@
                 <a:ea typeface="Arial" pitchFamily="34" charset="-122"/>
                 <a:cs typeface="Arial" pitchFamily="34" charset="-120"/>
               </a:rPr>
-              <a:t>stringfestanalytics.com  ·  AI for Excel Demo Day  ·  3 / 14</a:t>
+              <a:t>stringfestanalytics.com  ·  AI for Excel Demo Day  ·  3 / 16</a:t>
             </a:r>
             <a:endParaRPr lang="en-US" sz="900" dirty="0"/>
           </a:p>
@@ -9667,7 +10709,7 @@
                 <a:ea typeface="Arial" pitchFamily="34" charset="-122"/>
                 <a:cs typeface="Arial" pitchFamily="34" charset="-120"/>
               </a:rPr>
-              <a:t>It's the same conversational pattern as a modern LLM — minus the language model. The closest thing to ChatGPT that's already in your ribbon.</a:t>
+              <a:t>It's the same conversational pattern as a modern LLM, minus the language model. The closest thing to ChatGPT that's already in your ribbon.</a:t>
             </a:r>
             <a:endParaRPr lang="en-US" sz="1300" dirty="0"/>
           </a:p>
@@ -9795,7 +10837,7 @@
                 <a:ea typeface="Arial" pitchFamily="34" charset="-122"/>
                 <a:cs typeface="Arial" pitchFamily="34" charset="-120"/>
               </a:rPr>
-              <a:t>Use it to ask 'find total sales by channel' on our wholesale data — and watch what happens.</a:t>
+              <a:t>Use it to ask 'find total sales by channel' on our wholesale data, and watch what happens.</a:t>
             </a:r>
             <a:endParaRPr lang="en-US" sz="1300" dirty="0"/>
           </a:p>
@@ -9834,7 +10876,7 @@
                 <a:ea typeface="Arial" pitchFamily="34" charset="-122"/>
                 <a:cs typeface="Arial" pitchFamily="34" charset="-120"/>
               </a:rPr>
-              <a:t>stringfestanalytics.com  ·  AI for Excel Demo Day  ·  4 / 14</a:t>
+              <a:t>stringfestanalytics.com  ·  AI for Excel Demo Day  ·  4 / 16</a:t>
             </a:r>
             <a:endParaRPr lang="en-US" sz="900" dirty="0"/>
           </a:p>
@@ -10111,7 +11153,7 @@
                 <a:ea typeface="Arial" pitchFamily="34" charset="-122"/>
                 <a:cs typeface="Arial" pitchFamily="34" charset="-120"/>
               </a:rPr>
-              <a:t>A chart of “Sum of Channel” —  </a:t>
+              <a:t>A chart of “Sum of Channel”,  </a:t>
             </a:r>
             <a:endParaRPr lang="en-US" sz="1300" dirty="0"/>
           </a:p>
@@ -10433,7 +11475,7 @@
                 <a:ea typeface="Arial" pitchFamily="34" charset="-122"/>
                 <a:cs typeface="Arial" pitchFamily="34" charset="-120"/>
               </a:rPr>
-              <a:t>stringfestanalytics.com  ·  AI for Excel Demo Day  ·  5 / 14</a:t>
+              <a:t>stringfestanalytics.com  ·  AI for Excel Demo Day  ·  5 / 16</a:t>
             </a:r>
             <a:endParaRPr lang="en-US" sz="900" dirty="0"/>
           </a:p>
@@ -10543,7 +11585,7 @@
                 <a:ea typeface="Arial" pitchFamily="34" charset="-122"/>
                 <a:cs typeface="Arial" pitchFamily="34" charset="-120"/>
               </a:rPr>
-              <a:t>The data was tabular — but not in the shape a machine could reason about.</a:t>
+              <a:t>The data was tabular, but not in the shape a machine could reason about.</a:t>
             </a:r>
             <a:endParaRPr lang="en-US" sz="1400" dirty="0"/>
           </a:p>
@@ -10969,7 +12011,7 @@
                 <a:ea typeface="Arial" pitchFamily="34" charset="-122"/>
                 <a:cs typeface="Arial" pitchFamily="34" charset="-120"/>
               </a:rPr>
-              <a:t>Each row holds 6 values. The tool doesn't know which to add — or that all 6 should be.</a:t>
+              <a:t>Each row holds 6 values. The tool doesn't know which to add, or that all 6 should be.</a:t>
             </a:r>
             <a:endParaRPr lang="en-US" sz="1300" dirty="0"/>
           </a:p>
@@ -11008,7 +12050,7 @@
                 <a:ea typeface="Arial" pitchFamily="34" charset="-122"/>
                 <a:cs typeface="Arial" pitchFamily="34" charset="-120"/>
               </a:rPr>
-              <a:t>stringfestanalytics.com  ·  AI for Excel Demo Day  ·  6 / 14</a:t>
+              <a:t>stringfestanalytics.com  ·  AI for Excel Demo Day  ·  6 / 16</a:t>
             </a:r>
             <a:endParaRPr lang="en-US" sz="900" dirty="0"/>
           </a:p>
@@ -11401,7 +12443,7 @@
                 <a:ea typeface="Arial" pitchFamily="34" charset="-122"/>
                 <a:cs typeface="Arial" pitchFamily="34" charset="-120"/>
               </a:rPr>
-              <a:t>stringfestanalytics.com  ·  AI for Excel Demo Day  ·  7 / 14</a:t>
+              <a:t>stringfestanalytics.com  ·  AI for Excel Demo Day  ·  7 / 16</a:t>
             </a:r>
             <a:endParaRPr lang="en-US" sz="900" dirty="0"/>
           </a:p>
@@ -12051,7 +13093,7 @@
                 <a:ea typeface="Arial" pitchFamily="34" charset="-122"/>
                 <a:cs typeface="Arial" pitchFamily="34" charset="-120"/>
               </a:rPr>
-              <a:t>stringfestanalytics.com  ·  AI for Excel Demo Day  ·  8 / 14</a:t>
+              <a:t>stringfestanalytics.com  ·  AI for Excel Demo Day  ·  8 / 16</a:t>
             </a:r>
             <a:endParaRPr lang="en-US" sz="900" dirty="0"/>
           </a:p>
@@ -12513,7 +13555,7 @@
                 <a:ea typeface="Arial" pitchFamily="34" charset="-122"/>
                 <a:cs typeface="Arial" pitchFamily="34" charset="-120"/>
               </a:rPr>
-              <a:t>Boring — in the best way</a:t>
+              <a:t>Boring, in the best way</a:t>
             </a:r>
             <a:endParaRPr lang="en-US" sz="1300" dirty="0"/>
           </a:p>

--- a/AI-for-Excel-Demo-Day.pptx
+++ b/AI-for-Excel-Demo-Day.pptx
@@ -13,6 +13,8 @@
     <p:sldId id="261" r:id="rId7"/>
     <p:sldId id="262" r:id="rId8"/>
     <p:sldId id="263" r:id="rId9"/>
+    <p:sldId id="272" r:id="rId23"/>
+    <p:sldId id="273" r:id="rId24"/>
     <p:sldId id="264" r:id="rId10"/>
     <p:sldId id="265" r:id="rId11"/>
     <p:sldId id="266" r:id="rId12"/>
@@ -1157,6 +1159,182 @@
             <a:fld id="{F7021451-1387-4CA6-816F-3879F97B5CBC}" type="slidenum">
               <a:rPr lang="en-US"/>
               <a:t>14</a:t>
+            </a:fld>
+            <a:endParaRPr lang="en-US"/>
+          </a:p>
+        </p:txBody>
+      </p:sp>
+    </p:spTree>
+    <p:extLst>
+      <p:ext uri="{BB962C8B-B14F-4D97-AF65-F5344CB8AC3E}">
+        <p14:creationId xmlns:p14="http://schemas.microsoft.com/office/powerpoint/2010/main" val="1024086991"/>
+      </p:ext>
+    </p:extLst>
+  </p:cSld>
+  <p:clrMapOvr>
+    <a:masterClrMapping/>
+  </p:clrMapOvr>
+</p:notes>
+</file>
+
+<file path=ppt/notesSlides/notesSlide17.xml><?xml version="1.0" encoding="utf-8"?>
+<p:notes xmlns:a="http://schemas.openxmlformats.org/drawingml/2006/main" xmlns:r="http://schemas.openxmlformats.org/officeDocument/2006/relationships" xmlns:p="http://schemas.openxmlformats.org/presentationml/2006/main">
+  <p:cSld>
+    <p:spTree>
+      <p:nvGrpSpPr>
+        <p:cNvPr id="1" name=""/>
+        <p:cNvGrpSpPr/>
+        <p:nvPr/>
+      </p:nvGrpSpPr>
+      <p:grpSpPr>
+        <a:xfrm>
+          <a:off x="0" y="0"/>
+          <a:ext cx="0" cy="0"/>
+          <a:chOff x="0" y="0"/>
+          <a:chExt cx="0" cy="0"/>
+        </a:xfrm>
+      </p:grpSpPr>
+      <p:sp>
+        <p:nvSpPr>
+          <p:cNvPr id="2" name="Slide Image Placeholder 1"/>
+          <p:cNvSpPr>
+            <a:spLocks noGrp="1" noRot="1" noChangeAspect="1"/>
+          </p:cNvSpPr>
+          <p:nvPr>
+            <p:ph type="sldImg"/>
+          </p:nvPr>
+        </p:nvSpPr>
+        <p:spPr/>
+      </p:sp>
+      <p:sp>
+        <p:nvSpPr>
+          <p:cNvPr id="3" name="Notes Placeholder 2"/>
+          <p:cNvSpPr>
+            <a:spLocks noGrp="1"/>
+          </p:cNvSpPr>
+          <p:nvPr>
+            <p:ph type="body" idx="1"/>
+          </p:nvPr>
+        </p:nvSpPr>
+        <p:spPr/>
+        <p:txBody>
+          <a:bodyPr/>
+          <a:lstStyle/>
+          <a:p>
+            <a:r>
+              <a:rPr lang="en-US" dirty="0"/>
+              <a:t>LIVE or talk-through. After you build the query by clicking, open the Advanced Editor and copy the M. Paste it into Copilot or Claude and ask it to comment each step and flag anything fragile. Read the comments back: this is the moment analysts who are scared of code relax, because the AI is annotating THEIR working query, not replacing it. Hit the fragile flag out loud (the unpivot sweeps in any new column) so they see the audit value. Key line: the code still runs the same every refresh; AI just made it legible.</a:t>
+            </a:r>
+            <a:endParaRPr lang="en-US" dirty="0"/>
+          </a:p>
+        </p:txBody>
+      </p:sp>
+      <p:sp>
+        <p:nvSpPr>
+          <p:cNvPr id="4" name="Slide Number Placeholder 3"/>
+          <p:cNvSpPr>
+            <a:spLocks noGrp="1"/>
+          </p:cNvSpPr>
+          <p:nvPr>
+            <p:ph type="sldNum" sz="quarter" idx="10"/>
+          </p:nvPr>
+        </p:nvSpPr>
+        <p:spPr/>
+        <p:txBody>
+          <a:bodyPr/>
+          <a:lstStyle/>
+          <a:p>
+            <a:fld id="{F7021451-1387-4CA6-816F-3879F97B5CBC}" type="slidenum">
+              <a:rPr lang="en-US"/>
+              <a:t>9</a:t>
+            </a:fld>
+            <a:endParaRPr lang="en-US"/>
+          </a:p>
+        </p:txBody>
+      </p:sp>
+    </p:spTree>
+    <p:extLst>
+      <p:ext uri="{BB962C8B-B14F-4D97-AF65-F5344CB8AC3E}">
+        <p14:creationId xmlns:p14="http://schemas.microsoft.com/office/powerpoint/2010/main" val="1024086991"/>
+      </p:ext>
+    </p:extLst>
+  </p:cSld>
+  <p:clrMapOvr>
+    <a:masterClrMapping/>
+  </p:clrMapOvr>
+</p:notes>
+</file>
+
+<file path=ppt/notesSlides/notesSlide18.xml><?xml version="1.0" encoding="utf-8"?>
+<p:notes xmlns:a="http://schemas.openxmlformats.org/drawingml/2006/main" xmlns:r="http://schemas.openxmlformats.org/officeDocument/2006/relationships" xmlns:p="http://schemas.openxmlformats.org/presentationml/2006/main">
+  <p:cSld>
+    <p:spTree>
+      <p:nvGrpSpPr>
+        <p:cNvPr id="1" name=""/>
+        <p:cNvGrpSpPr/>
+        <p:nvPr/>
+      </p:nvGrpSpPr>
+      <p:grpSpPr>
+        <a:xfrm>
+          <a:off x="0" y="0"/>
+          <a:ext cx="0" cy="0"/>
+          <a:chOff x="0" y="0"/>
+          <a:chExt cx="0" cy="0"/>
+        </a:xfrm>
+      </p:grpSpPr>
+      <p:sp>
+        <p:nvSpPr>
+          <p:cNvPr id="2" name="Slide Image Placeholder 1"/>
+          <p:cNvSpPr>
+            <a:spLocks noGrp="1" noRot="1" noChangeAspect="1"/>
+          </p:cNvSpPr>
+          <p:nvPr>
+            <p:ph type="sldImg"/>
+          </p:nvPr>
+        </p:nvSpPr>
+        <p:spPr/>
+      </p:sp>
+      <p:sp>
+        <p:nvSpPr>
+          <p:cNvPr id="3" name="Notes Placeholder 2"/>
+          <p:cNvSpPr>
+            <a:spLocks noGrp="1"/>
+          </p:cNvSpPr>
+          <p:nvPr>
+            <p:ph type="body" idx="1"/>
+          </p:nvPr>
+        </p:nvSpPr>
+        <p:spPr/>
+        <p:txBody>
+          <a:bodyPr/>
+          <a:lstStyle/>
+          <a:p>
+            <a:r>
+              <a:rPr lang="en-US" dirty="0"/>
+              <a:t>The power move, and label it as advanced. Instead of clicking, describe the transform in plain English and ask for the M, then paste it into the Advanced Editor. Show the result, then give the honest caution: you own this output, read it before you trust it, one bad line breaks the refresh. Reassure the room that the point-and-click path from two slides ago is still the safe default; this is just how far it can go once you are comfortable.</a:t>
+            </a:r>
+            <a:endParaRPr lang="en-US" dirty="0"/>
+          </a:p>
+        </p:txBody>
+      </p:sp>
+      <p:sp>
+        <p:nvSpPr>
+          <p:cNvPr id="4" name="Slide Number Placeholder 3"/>
+          <p:cNvSpPr>
+            <a:spLocks noGrp="1"/>
+          </p:cNvSpPr>
+          <p:nvPr>
+            <p:ph type="sldNum" sz="quarter" idx="10"/>
+          </p:nvPr>
+        </p:nvSpPr>
+        <p:spPr/>
+        <p:txBody>
+          <a:bodyPr/>
+          <a:lstStyle/>
+          <a:p>
+            <a:fld id="{F7021451-1387-4CA6-816F-3879F97B5CBC}" type="slidenum">
+              <a:rPr lang="en-US"/>
+              <a:t>10</a:t>
             </a:fld>
             <a:endParaRPr lang="en-US"/>
           </a:p>
@@ -3255,7 +3433,7 @@
                 <a:ea typeface="Arial" pitchFamily="34" charset="-122"/>
                 <a:cs typeface="Arial" pitchFamily="34" charset="-120"/>
               </a:rPr>
-              <a:t>stringfestanalytics.com  ·  AI for Excel Demo Day  ·  10 / 16</a:t>
+              <a:t>stringfestanalytics.com  ·  AI for Excel Demo Day  ·  12 / 18</a:t>
             </a:r>
             <a:endParaRPr lang="en-US" sz="900" dirty="0"/>
           </a:p>
@@ -3799,7 +3977,7 @@
                 <a:ea typeface="Arial" pitchFamily="34" charset="-122"/>
                 <a:cs typeface="Arial" pitchFamily="34" charset="-120"/>
               </a:rPr>
-              <a:t>stringfestanalytics.com  ·  AI for Excel Demo Day  ·  11 / 16</a:t>
+              <a:t>stringfestanalytics.com  ·  AI for Excel Demo Day  ·  13 / 18</a:t>
             </a:r>
             <a:endParaRPr lang="en-US" sz="900" dirty="0"/>
           </a:p>
@@ -4780,7 +4958,7 @@
                 <a:ea typeface="Arial" pitchFamily="34" charset="-122"/>
                 <a:cs typeface="Arial" pitchFamily="34" charset="-120"/>
               </a:rPr>
-              <a:t>stringfestanalytics.com  ·  AI for Excel Demo Day  ·  13 / 16</a:t>
+              <a:t>stringfestanalytics.com  ·  AI for Excel Demo Day  ·  15 / 18</a:t>
             </a:r>
             <a:endParaRPr lang="en-US" sz="900" dirty="0"/>
           </a:p>
@@ -5846,7 +6024,7 @@
                 <a:ea typeface="Arial" pitchFamily="34" charset="-122"/>
                 <a:cs typeface="Arial" pitchFamily="34" charset="-120"/>
               </a:rPr>
-              <a:t>stringfestanalytics.com  ·  AI for Excel Demo Day  ·  12 / 16</a:t>
+              <a:t>stringfestanalytics.com  ·  AI for Excel Demo Day  ·  14 / 18</a:t>
             </a:r>
             <a:endParaRPr lang="en-US" sz="900" dirty="0"/>
           </a:p>
@@ -5862,11 +6040,11 @@
 
 <file path=ppt/slides/slide16.xml><?xml version="1.0" encoding="utf-8"?>
 <p:sld xmlns:a="http://schemas.openxmlformats.org/drawingml/2006/main" xmlns:r="http://schemas.openxmlformats.org/officeDocument/2006/relationships" xmlns:p="http://schemas.openxmlformats.org/presentationml/2006/main">
-  <p:cSld name="Slide 14">
+  <p:cSld name="Slide 16">
     <p:bg>
       <p:bgPr>
         <a:solidFill>
-          <a:srgbClr val="9C3526"/>
+          <a:srgbClr val="7F2619"/>
         </a:solidFill>
       </p:bgPr>
     </p:bg>
@@ -5884,16 +6062,40 @@
           <a:chExt cx="0" cy="0"/>
         </a:xfrm>
       </p:grpSpPr>
-      <p:sp>
-        <p:nvSpPr>
-          <p:cNvPr id="2" name="Kicker"/>
-          <p:cNvSpPr/>
-          <p:nvPr/>
-        </p:nvSpPr>
-        <p:spPr>
-          <a:xfrm>
-            <a:off x="457200" y="411480"/>
-            <a:ext cx="4800600" cy="300000"/>
+      <p:pic>
+        <p:nvPicPr>
+          <p:cNvPr id="2" name="Membership Art"/>
+          <p:cNvPicPr>
+            <a:picLocks noChangeAspect="1"/>
+          </p:cNvPicPr>
+          <p:nvPr/>
+        </p:nvPicPr>
+        <p:blipFill>
+          <a:blip r:embed="rId4"/>
+          <a:stretch>
+            <a:fillRect/>
+          </a:stretch>
+        </p:blipFill>
+        <p:spPr>
+          <a:xfrm>
+            <a:off x="2196840" y="240000"/>
+            <a:ext cx="4750320" cy="3169800"/>
+          </a:xfrm>
+          <a:prstGeom prst="rect">
+            <a:avLst/>
+          </a:prstGeom>
+        </p:spPr>
+      </p:pic>
+      <p:sp>
+        <p:nvSpPr>
+          <p:cNvPr id="3" name="ValueLine"/>
+          <p:cNvSpPr/>
+          <p:nvPr/>
+        </p:nvSpPr>
+        <p:spPr>
+          <a:xfrm>
+            <a:off x="685800" y="3500000"/>
+            <a:ext cx="7772400" cy="320000"/>
           </a:xfrm>
           <a:prstGeom prst="rect">
             <a:avLst/>
@@ -5905,11 +6107,50 @@
           <a:bodyPr wrap="square" lIns="0" tIns="0" rIns="0" bIns="0" rtlCol="0" anchor="ctr"/>
           <a:lstStyle/>
           <a:p>
-            <a:pPr indent="0" marL="0">
-              <a:buNone/>
-            </a:pPr>
-            <a:r>
-              <a:rPr lang="en-US" sz="1300" b="1" spc="400" kern="0" dirty="0">
+            <a:pPr algn="ctr" indent="0" marL="0">
+              <a:buNone/>
+            </a:pPr>
+            <a:r>
+              <a:rPr lang="en-US" sz="1400" dirty="0">
+                <a:solidFill>
+                  <a:srgbClr val="EFE3C8"/>
+                </a:solidFill>
+                <a:latin typeface="Arial" pitchFamily="34" charset="0"/>
+                <a:ea typeface="Arial" pitchFamily="34" charset="-122"/>
+                <a:cs typeface="Arial" pitchFamily="34" charset="-120"/>
+              </a:rPr>
+              <a:t>Today's session was recorded. Get it, plus the full back catalog, in the membership.</a:t>
+            </a:r>
+            <a:endParaRPr lang="en-US" sz="1400" dirty="0"/>
+          </a:p>
+        </p:txBody>
+      </p:sp>
+      <p:sp>
+        <p:nvSpPr>
+          <p:cNvPr id="4" name="Price"/>
+          <p:cNvSpPr/>
+          <p:nvPr/>
+        </p:nvSpPr>
+        <p:spPr>
+          <a:xfrm>
+            <a:off x="685800" y="3880000"/>
+            <a:ext cx="7772400" cy="460000"/>
+          </a:xfrm>
+          <a:prstGeom prst="rect">
+            <a:avLst/>
+          </a:prstGeom>
+          <a:noFill/>
+          <a:ln/>
+        </p:spPr>
+        <p:txBody>
+          <a:bodyPr wrap="square" lIns="0" tIns="0" rIns="0" bIns="0" rtlCol="0" anchor="ctr"/>
+          <a:lstStyle/>
+          <a:p>
+            <a:pPr algn="ctr" indent="0" marL="0">
+              <a:buNone/>
+            </a:pPr>
+            <a:r>
+              <a:rPr lang="en-US" sz="2600" b="1" dirty="0">
                 <a:solidFill>
                   <a:srgbClr val="E6A93C"/>
                 </a:solidFill>
@@ -5917,99 +6158,10 @@
                 <a:ea typeface="Arial Black" pitchFamily="34" charset="-122"/>
                 <a:cs typeface="Arial Black" pitchFamily="34" charset="-120"/>
               </a:rPr>
-              <a:t>WANT THE RECORDING?</a:t>
-            </a:r>
-            <a:endParaRPr lang="en-US" sz="1300" dirty="0"/>
-          </a:p>
-        </p:txBody>
-      </p:sp>
-      <p:sp>
-        <p:nvSpPr>
-          <p:cNvPr id="3" name="Headline"/>
-          <p:cNvSpPr/>
-          <p:nvPr/>
-        </p:nvSpPr>
-        <p:spPr>
-          <a:xfrm>
-            <a:off x="457200" y="800100"/>
-            <a:ext cx="4800600" cy="1280160"/>
-          </a:xfrm>
-          <a:prstGeom prst="rect">
-            <a:avLst/>
-          </a:prstGeom>
-          <a:noFill/>
-          <a:ln/>
-        </p:spPr>
-        <p:txBody>
-          <a:bodyPr wrap="square" lIns="0" tIns="0" rIns="0" bIns="0" rtlCol="0" anchor="ctr"/>
-          <a:lstStyle/>
-          <a:p>
-            <a:pPr indent="0" marL="0">
-              <a:lnSpc>
-                <a:spcPct val="98000"/>
-              </a:lnSpc>
-              <a:buNone/>
-            </a:pPr>
-            <a:r>
-              <a:rPr lang="en-US" sz="3600" b="1" dirty="0">
-                <a:solidFill>
-                  <a:srgbClr val="EFE3C8"/>
-                </a:solidFill>
-                <a:latin typeface="Arial Black" pitchFamily="34" charset="0"/>
-                <a:ea typeface="Arial Black" pitchFamily="34" charset="-122"/>
-                <a:cs typeface="Arial Black" pitchFamily="34" charset="-120"/>
-              </a:rPr>
-              <a:t>THE MODERN</a:t>
-            </a:r>
-          </a:p>
-          <a:p>
-            <a:pPr indent="0" marL="0">
-              <a:lnSpc>
-                <a:spcPct val="98000"/>
-              </a:lnSpc>
-              <a:buNone/>
-            </a:pPr>
-            <a:r>
-              <a:rPr lang="en-US" sz="3600" b="1" dirty="0">
-                <a:solidFill>
-                  <a:srgbClr val="E6A93C"/>
-                </a:solidFill>
-                <a:latin typeface="Arial Black" pitchFamily="34" charset="0"/>
-                <a:ea typeface="Arial Black" pitchFamily="34" charset="-122"/>
-                <a:cs typeface="Arial Black" pitchFamily="34" charset="-120"/>
-              </a:rPr>
-              <a:t>EXCEL AI STACK</a:t>
-            </a:r>
-            <a:endParaRPr lang="en-US" sz="3600" dirty="0"/>
-          </a:p>
-        </p:txBody>
-      </p:sp>
-      <p:sp>
-        <p:nvSpPr>
-          <p:cNvPr id="4" name="Subhead"/>
-          <p:cNvSpPr/>
-          <p:nvPr/>
-        </p:nvSpPr>
-        <p:spPr>
-          <a:xfrm>
-            <a:off x="457200" y="2118360"/>
-            <a:ext cx="4663440" cy="548640"/>
-          </a:xfrm>
-          <a:prstGeom prst="rect">
-            <a:avLst/>
-          </a:prstGeom>
-          <a:noFill/>
-          <a:ln/>
-        </p:spPr>
-        <p:txBody>
-          <a:bodyPr wrap="square" lIns="0" tIns="0" rIns="0" bIns="0" rtlCol="0" anchor="ctr"/>
-          <a:lstStyle/>
-          <a:p>
-            <a:pPr indent="0" marL="0">
-              <a:buNone/>
-            </a:pPr>
-            <a:r>
-              <a:rPr lang="en-US" sz="1400" dirty="0">
+              <a:t>$10 / month</a:t>
+            </a:r>
+            <a:r>
+              <a:rPr lang="en-US" sz="1500" i="1" baseline="6000" dirty="0">
                 <a:solidFill>
                   <a:srgbClr val="EFE3C8"/>
                 </a:solidFill>
@@ -6017,94 +6169,15 @@
                 <a:ea typeface="Arial" pitchFamily="34" charset="-122"/>
                 <a:cs typeface="Arial" pitchFamily="34" charset="-120"/>
               </a:rPr>
-              <a:t>Today's session was recorded. It lives in the membership, with every other workshop.</a:t>
-            </a:r>
-            <a:endParaRPr lang="en-US" sz="1400" dirty="0"/>
-          </a:p>
-        </p:txBody>
-      </p:sp>
-      <p:sp>
-        <p:nvSpPr>
-          <p:cNvPr id="5" name="Values"/>
-          <p:cNvSpPr/>
-          <p:nvPr/>
-        </p:nvSpPr>
-        <p:spPr>
-          <a:xfrm>
-            <a:off x="457200" y="2773680"/>
-            <a:ext cx="4663440" cy="1188720"/>
-          </a:xfrm>
-          <a:prstGeom prst="rect">
-            <a:avLst/>
-          </a:prstGeom>
-          <a:noFill/>
-          <a:ln/>
-        </p:spPr>
-        <p:txBody>
-          <a:bodyPr wrap="square" lIns="0" tIns="0" rIns="0" bIns="0" rtlCol="0" anchor="ctr"/>
-          <a:lstStyle/>
-          <a:p>
-            <a:pPr indent="-274320" marL="274320">
-              <a:spcAft>
-                <a:spcPts val="700"/>
-              </a:spcAft>
-              <a:buFont typeface="Arial" pitchFamily="34" charset="0"/>
-              <a:buChar char="→"/>
-            </a:pPr>
-            <a:r>
-              <a:rPr lang="en-US" sz="1500" dirty="0">
-                <a:solidFill>
-                  <a:srgbClr val="EFE3C8"/>
-                </a:solidFill>
-                <a:latin typeface="Arial" pitchFamily="34" charset="0"/>
-                <a:ea typeface="Arial" pitchFamily="34" charset="-122"/>
-                <a:cs typeface="Arial" pitchFamily="34" charset="-120"/>
-              </a:rPr>
-              <a:t>Every session recording, including today's</a:t>
-            </a:r>
-          </a:p>
-          <a:p>
-            <a:pPr indent="-274320" marL="274320">
-              <a:spcAft>
-                <a:spcPts val="700"/>
-              </a:spcAft>
-              <a:buFont typeface="Arial" pitchFamily="34" charset="0"/>
-              <a:buChar char="→"/>
-            </a:pPr>
-            <a:r>
-              <a:rPr lang="en-US" sz="1500" dirty="0">
-                <a:solidFill>
-                  <a:srgbClr val="EFE3C8"/>
-                </a:solidFill>
-                <a:latin typeface="Arial" pitchFamily="34" charset="0"/>
-                <a:ea typeface="Arial" pitchFamily="34" charset="-122"/>
-                <a:cs typeface="Arial" pitchFamily="34" charset="-120"/>
-              </a:rPr>
-              <a:t>The full back catalog, ready to binge</a:t>
-            </a:r>
-          </a:p>
-          <a:p>
-            <a:pPr indent="-274320" marL="274320">
-              <a:buFont typeface="Arial" pitchFamily="34" charset="0"/>
-              <a:buChar char="→"/>
-            </a:pPr>
-            <a:r>
-              <a:rPr lang="en-US" sz="1500" dirty="0">
-                <a:solidFill>
-                  <a:srgbClr val="EFE3C8"/>
-                </a:solidFill>
-                <a:latin typeface="Arial" pitchFamily="34" charset="0"/>
-                <a:ea typeface="Arial" pitchFamily="34" charset="-122"/>
-                <a:cs typeface="Arial" pitchFamily="34" charset="-120"/>
-              </a:rPr>
-              <a:t>New workshops as they land</a:t>
-            </a:r>
-          </a:p>
-        </p:txBody>
-      </p:sp>
-      <p:sp>
-        <p:nvSpPr>
-          <p:cNvPr id="6" name="LinkPill">
+              <a:t xml:space="preserve">    cancel anytime</a:t>
+            </a:r>
+            <a:endParaRPr lang="en-US" sz="2600" dirty="0"/>
+          </a:p>
+        </p:txBody>
+      </p:sp>
+      <p:sp>
+        <p:nvSpPr>
+          <p:cNvPr id="5" name="LinkPill">
             <a:hlinkClick xmlns:a="http://schemas.openxmlformats.org/drawingml/2006/main" xmlns:r="http://schemas.openxmlformats.org/officeDocument/2006/relationships" r:id="rId2"/>
           </p:cNvPr>
           <p:cNvSpPr/>
@@ -6112,8 +6185,8 @@
         </p:nvSpPr>
         <p:spPr>
           <a:xfrm>
-            <a:off x="457200" y="4160520"/>
-            <a:ext cx="4663440" cy="566928"/>
+            <a:off x="2011680" y="4400000"/>
+            <a:ext cx="5120640" cy="600000"/>
           </a:xfrm>
           <a:prstGeom prst="roundRect">
             <a:avLst>
@@ -6133,7 +6206,7 @@
               <a:buNone/>
             </a:pPr>
             <a:r>
-              <a:rPr lang="en-US" sz="1400" b="1" dirty="0">
+              <a:rPr lang="en-US" sz="1500" b="1" dirty="0">
                 <a:solidFill>
                   <a:srgbClr val="3B2218"/>
                 </a:solidFill>
@@ -6143,129 +6216,891 @@
               </a:rPr>
               <a:t>stringfestdata.gumroad.com/l/mxlais</a:t>
             </a:r>
-            <a:endParaRPr lang="en-US" sz="1400" dirty="0"/>
-          </a:p>
-        </p:txBody>
-      </p:sp>
-      <p:sp>
-        <p:nvSpPr>
-          <p:cNvPr id="7" name="PriceCard"/>
-          <p:cNvSpPr/>
-          <p:nvPr/>
-        </p:nvSpPr>
-        <p:spPr>
-          <a:xfrm>
-            <a:off x="5638800" y="1188720"/>
-            <a:ext cx="3048000" cy="2766060"/>
-          </a:xfrm>
-          <a:prstGeom prst="roundRect">
-            <a:avLst>
-              <a:gd name="adj" fmla="val 7000"/>
-            </a:avLst>
-          </a:prstGeom>
-          <a:solidFill>
-            <a:srgbClr val="EFE3C8"/>
-          </a:solidFill>
-          <a:ln w="19050">
-            <a:solidFill>
-              <a:srgbClr val="E6A93C"/>
-            </a:solidFill>
-          </a:ln>
-        </p:spPr>
-        <p:txBody>
-          <a:bodyPr wrap="square" lIns="91440" tIns="91440" rIns="91440" bIns="91440" rtlCol="0" anchor="ctr"/>
-          <a:lstStyle/>
-          <a:p>
-            <a:pPr algn="ctr" indent="0" marL="0">
-              <a:buNone/>
-            </a:pPr>
-            <a:r>
-              <a:rPr lang="en-US" sz="7200" b="1" dirty="0">
-                <a:solidFill>
-                  <a:srgbClr val="9C3526"/>
+            <a:endParaRPr lang="en-US" sz="1500" dirty="0"/>
+          </a:p>
+        </p:txBody>
+      </p:sp>
+    </p:spTree>
+  </p:cSld>
+  <p:clrMapOvr>
+    <a:masterClrMapping/>
+  </p:clrMapOvr>
+</p:sld>
+</file>
+
+<file path=ppt/slides/slide17.xml><?xml version="1.0" encoding="utf-8"?>
+<p:sld xmlns:a="http://schemas.openxmlformats.org/drawingml/2006/main" xmlns:r="http://schemas.openxmlformats.org/officeDocument/2006/relationships" xmlns:p="http://schemas.openxmlformats.org/presentationml/2006/main">
+  <p:cSld name="Slide 9">
+    <p:bg>
+      <p:bgPr>
+        <a:solidFill>
+          <a:srgbClr val="EEECE1"/>
+        </a:solidFill>
+      </p:bgPr>
+    </p:bg>
+    <p:spTree>
+      <p:nvGrpSpPr>
+        <p:cNvPr id="1" name=""/>
+        <p:cNvGrpSpPr/>
+        <p:nvPr/>
+      </p:nvGrpSpPr>
+      <p:grpSpPr>
+        <a:xfrm>
+          <a:off x="0" y="0"/>
+          <a:ext cx="0" cy="0"/>
+          <a:chOff x="0" y="0"/>
+          <a:chExt cx="0" cy="0"/>
+        </a:xfrm>
+      </p:grpSpPr>
+      <p:sp>
+        <p:nvSpPr>
+          <p:cNvPr id="2" name="Title"/>
+          <p:cNvSpPr/>
+          <p:nvPr/>
+        </p:nvSpPr>
+        <p:spPr>
+          <a:xfrm>
+            <a:off x="457200" y="320040"/>
+            <a:ext cx="8229600" cy="560000"/>
+          </a:xfrm>
+          <a:prstGeom prst="rect">
+            <a:avLst/>
+          </a:prstGeom>
+          <a:noFill/>
+          <a:ln/>
+        </p:spPr>
+        <p:txBody>
+          <a:bodyPr wrap="square" lIns="0" tIns="0" rIns="0" bIns="0" rtlCol="0" anchor="ctr"/>
+          <a:lstStyle/>
+          <a:p>
+            <a:pPr indent="0" marL="0">
+              <a:buNone/>
+            </a:pPr>
+            <a:r>
+              <a:rPr lang="en-US" sz="3000" b="1" dirty="0">
+                <a:solidFill>
+                  <a:srgbClr val="1F2120"/>
                 </a:solidFill>
                 <a:latin typeface="Arial Black" pitchFamily="34" charset="0"/>
                 <a:ea typeface="Arial Black" pitchFamily="34" charset="-122"/>
                 <a:cs typeface="Arial Black" pitchFamily="34" charset="-120"/>
               </a:rPr>
-              <a:t>$10</a:t>
-            </a:r>
-          </a:p>
-          <a:p>
-            <a:pPr algn="ctr" indent="0" marL="0">
-              <a:buNone/>
-            </a:pPr>
-            <a:r>
-              <a:rPr lang="en-US" sz="1900" b="1" spc="200" dirty="0">
-                <a:solidFill>
-                  <a:srgbClr val="3B2218"/>
+              <a:t>Have AI document your query</a:t>
+            </a:r>
+            <a:endParaRPr lang="en-US" sz="3000" dirty="0"/>
+          </a:p>
+        </p:txBody>
+      </p:sp>
+      <p:sp>
+        <p:nvSpPr>
+          <p:cNvPr id="3" name="Subtitle"/>
+          <p:cNvSpPr/>
+          <p:nvPr/>
+        </p:nvSpPr>
+        <p:spPr>
+          <a:xfrm>
+            <a:off x="457200" y="900000"/>
+            <a:ext cx="8229600" cy="300000"/>
+          </a:xfrm>
+          <a:prstGeom prst="rect">
+            <a:avLst/>
+          </a:prstGeom>
+          <a:noFill/>
+          <a:ln/>
+        </p:spPr>
+        <p:txBody>
+          <a:bodyPr wrap="square" lIns="0" tIns="0" rIns="0" bIns="0" rtlCol="0" anchor="ctr"/>
+          <a:lstStyle/>
+          <a:p>
+            <a:pPr indent="0" marL="0">
+              <a:buNone/>
+            </a:pPr>
+            <a:r>
+              <a:rPr lang="en-US" sz="1300" i="1" dirty="0">
+                <a:solidFill>
+                  <a:srgbClr val="707070"/>
                 </a:solidFill>
                 <a:latin typeface="Arial" pitchFamily="34" charset="0"/>
                 <a:ea typeface="Arial" pitchFamily="34" charset="-122"/>
                 <a:cs typeface="Arial" pitchFamily="34" charset="-120"/>
               </a:rPr>
-              <a:t>per month</a:t>
-            </a:r>
-          </a:p>
-          <a:p>
-            <a:pPr algn="ctr" indent="0" marL="0">
-              <a:buNone/>
-            </a:pPr>
-            <a:endParaRPr lang="en-US" sz="700" dirty="0"/>
-          </a:p>
-          <a:p>
-            <a:pPr algn="ctr" indent="0" marL="0">
-              <a:buNone/>
-            </a:pPr>
-            <a:r>
-              <a:rPr lang="en-US" sz="1200" i="1" dirty="0">
-                <a:solidFill>
-                  <a:srgbClr val="6E5742"/>
+              <a:t>You built it by clicking. Now make it readable and auditable.</a:t>
+            </a:r>
+            <a:endParaRPr lang="en-US" sz="1300" dirty="0"/>
+          </a:p>
+        </p:txBody>
+      </p:sp>
+      <p:sp>
+        <p:nvSpPr>
+          <p:cNvPr id="4" name="AskBox"/>
+          <p:cNvSpPr/>
+          <p:nvPr/>
+        </p:nvSpPr>
+        <p:spPr>
+          <a:xfrm>
+            <a:off x="457200" y="1280000"/>
+            <a:ext cx="8229600" cy="640080"/>
+          </a:xfrm>
+          <a:prstGeom prst="roundRect">
+            <a:avLst>
+              <a:gd name="adj" fmla="val 9000"/>
+            </a:avLst>
+          </a:prstGeom>
+          <a:solidFill>
+            <a:srgbClr val="FFFFFF"/>
+          </a:solidFill>
+          <a:ln w="12700">
+            <a:solidFill>
+              <a:srgbClr val="C9C4B5"/>
+            </a:solidFill>
+          </a:ln>
+        </p:spPr>
+        <p:txBody>
+          <a:bodyPr wrap="square" lIns="137160" tIns="45720" rIns="137160" bIns="45720" rtlCol="0" anchor="ctr"/>
+          <a:lstStyle/>
+          <a:p>
+            <a:pPr indent="0" marL="0">
+              <a:buNone/>
+            </a:pPr>
+            <a:r>
+              <a:rPr lang="en-US" sz="1050" b="1" spc="200" dirty="0">
+                <a:solidFill>
+                  <a:srgbClr val="CF3338"/>
                 </a:solidFill>
                 <a:latin typeface="Arial" pitchFamily="34" charset="0"/>
                 <a:ea typeface="Arial" pitchFamily="34" charset="-122"/>
                 <a:cs typeface="Arial" pitchFamily="34" charset="-120"/>
               </a:rPr>
-              <a:t>cancel anytime</a:t>
-            </a:r>
-            <a:endParaRPr lang="en-US" sz="1200" dirty="0"/>
-          </a:p>
-        </p:txBody>
-      </p:sp>
-      <p:sp>
-        <p:nvSpPr>
-          <p:cNvPr id="8" name="Brand"/>
-          <p:cNvSpPr/>
-          <p:nvPr/>
-        </p:nvSpPr>
-        <p:spPr>
-          <a:xfrm>
-            <a:off x="457200" y="4815840"/>
-            <a:ext cx="4663440" cy="246380"/>
-          </a:xfrm>
-          <a:prstGeom prst="rect">
-            <a:avLst/>
-          </a:prstGeom>
-          <a:noFill/>
-          <a:ln/>
-        </p:spPr>
-        <p:txBody>
-          <a:bodyPr wrap="square" lIns="0" tIns="0" rIns="0" bIns="0" rtlCol="0" anchor="ctr"/>
-          <a:lstStyle/>
-          <a:p>
-            <a:pPr indent="0" marL="0">
-              <a:buNone/>
-            </a:pPr>
-            <a:r>
-              <a:rPr lang="en-US" sz="900" dirty="0">
-                <a:solidFill>
-                  <a:srgbClr val="D9A98A"/>
+              <a:t xml:space="preserve">ASK  </a:t>
+            </a:r>
+            <a:r>
+              <a:rPr lang="en-US" sz="1250" i="1" dirty="0">
+                <a:solidFill>
+                  <a:srgbClr val="1F2120"/>
                 </a:solidFill>
                 <a:latin typeface="Arial" pitchFamily="34" charset="0"/>
                 <a:ea typeface="Arial" pitchFamily="34" charset="-122"/>
                 <a:cs typeface="Arial" pitchFamily="34" charset="-120"/>
               </a:rPr>
-              <a:t>stringfestanalytics.com  ·  AI for Excel Demo Day</a:t>
+              <a:t>Paste the M and say: "Comment each step, and flag anything fragile."</a:t>
+            </a:r>
+            <a:endParaRPr lang="en-US" sz="1250" dirty="0"/>
+          </a:p>
+        </p:txBody>
+      </p:sp>
+      <p:sp>
+        <p:nvSpPr>
+          <p:cNvPr id="5" name="CodePanel"/>
+          <p:cNvSpPr/>
+          <p:nvPr/>
+        </p:nvSpPr>
+        <p:spPr>
+          <a:xfrm>
+            <a:off x="457200" y="1990000"/>
+            <a:ext cx="8229600" cy="2430000"/>
+          </a:xfrm>
+          <a:prstGeom prst="roundRect">
+            <a:avLst>
+              <a:gd name="adj" fmla="val 4000"/>
+            </a:avLst>
+          </a:prstGeom>
+          <a:solidFill>
+            <a:srgbClr val="1F2120"/>
+          </a:solidFill>
+          <a:ln/>
+        </p:spPr>
+        <p:txBody>
+          <a:bodyPr wrap="square" lIns="182880" tIns="137160" rIns="182880" bIns="137160" rtlCol="0" anchor="ctr"/>
+          <a:lstStyle/>
+          <a:p>
+            <a:pPr indent="0" marL="0">
+              <a:lnSpc>
+                <a:spcPct val="112000"/>
+              </a:lnSpc>
+              <a:buNone/>
+            </a:pPr>
+            <a:r>
+              <a:rPr lang="en-US" sz="1000" dirty="0">
+                <a:solidFill>
+                  <a:srgbClr val="E6A93C"/>
+                </a:solidFill>
+                <a:latin typeface="Consolas" pitchFamily="49" charset="0"/>
+                <a:cs typeface="Consolas" pitchFamily="49" charset="0"/>
+              </a:rPr>
+              <a:t xml:space="preserve">let</a:t>
+            </a:r>
+          </a:p>
+          <a:p>
+            <a:pPr indent="0" marL="0">
+              <a:lnSpc>
+                <a:spcPct val="112000"/>
+              </a:lnSpc>
+              <a:buNone/>
+            </a:pPr>
+            <a:r>
+              <a:rPr lang="en-US" sz="1000" dirty="0">
+                <a:solidFill>
+                  <a:srgbClr val="D9D2C4"/>
+                </a:solidFill>
+                <a:latin typeface="Consolas" pitchFamily="49" charset="0"/>
+                <a:cs typeface="Consolas" pitchFamily="49" charset="0"/>
+              </a:rPr>
+              <a:t xml:space="preserve">    Src = Excel.CurrentWorkbook(){[Name="Wholesale"]}[Content],</a:t>
+            </a:r>
+          </a:p>
+          <a:p>
+            <a:pPr indent="0" marL="0">
+              <a:lnSpc>
+                <a:spcPct val="112000"/>
+              </a:lnSpc>
+              <a:buNone/>
+            </a:pPr>
+            <a:r>
+              <a:rPr lang="en-US" sz="1000" dirty="0">
+                <a:solidFill>
+                  <a:srgbClr val="8FB573"/>
+                </a:solidFill>
+                <a:latin typeface="Consolas" pitchFamily="49" charset="0"/>
+                <a:cs typeface="Consolas" pitchFamily="49" charset="0"/>
+              </a:rPr>
+              <a:t xml:space="preserve">    // Swap the Channel codes for real labels</a:t>
+            </a:r>
+          </a:p>
+          <a:p>
+            <a:pPr indent="0" marL="0">
+              <a:lnSpc>
+                <a:spcPct val="112000"/>
+              </a:lnSpc>
+              <a:buNone/>
+            </a:pPr>
+            <a:r>
+              <a:rPr lang="en-US" sz="1000" dirty="0">
+                <a:solidFill>
+                  <a:srgbClr val="D9D2C4"/>
+                </a:solidFill>
+                <a:latin typeface="Consolas" pitchFamily="49" charset="0"/>
+                <a:cs typeface="Consolas" pitchFamily="49" charset="0"/>
+              </a:rPr>
+              <a:t xml:space="preserve">    C1 = Table.ReplaceValue(Src, 1, "HoReCa", Replacer.ReplaceValue, {"Channel"}),</a:t>
+            </a:r>
+          </a:p>
+          <a:p>
+            <a:pPr indent="0" marL="0">
+              <a:lnSpc>
+                <a:spcPct val="112000"/>
+              </a:lnSpc>
+              <a:buNone/>
+            </a:pPr>
+            <a:r>
+              <a:rPr lang="en-US" sz="1000" dirty="0">
+                <a:solidFill>
+                  <a:srgbClr val="D9D2C4"/>
+                </a:solidFill>
+                <a:latin typeface="Consolas" pitchFamily="49" charset="0"/>
+                <a:cs typeface="Consolas" pitchFamily="49" charset="0"/>
+              </a:rPr>
+              <a:t xml:space="preserve">    C2 = Table.ReplaceValue(C1, 2, "Retail", Replacer.ReplaceValue, {"Channel"}),</a:t>
+            </a:r>
+          </a:p>
+          <a:p>
+            <a:pPr indent="0" marL="0">
+              <a:lnSpc>
+                <a:spcPct val="112000"/>
+              </a:lnSpc>
+              <a:buNone/>
+            </a:pPr>
+            <a:r>
+              <a:rPr lang="en-US" sz="1000" dirty="0">
+                <a:solidFill>
+                  <a:srgbClr val="8FB573"/>
+                </a:solidFill>
+                <a:latin typeface="Consolas" pitchFamily="49" charset="0"/>
+                <a:cs typeface="Consolas" pitchFamily="49" charset="0"/>
+              </a:rPr>
+              <a:t xml:space="preserve">    // Six spend columns become Category + Spend</a:t>
+            </a:r>
+          </a:p>
+          <a:p>
+            <a:pPr indent="0" marL="0">
+              <a:lnSpc>
+                <a:spcPct val="112000"/>
+              </a:lnSpc>
+              <a:buNone/>
+            </a:pPr>
+            <a:r>
+              <a:rPr lang="en-US" sz="1000" dirty="0">
+                <a:solidFill>
+                  <a:srgbClr val="D9D2C4"/>
+                </a:solidFill>
+                <a:latin typeface="Consolas" pitchFamily="49" charset="0"/>
+                <a:cs typeface="Consolas" pitchFamily="49" charset="0"/>
+              </a:rPr>
+              <a:t xml:space="preserve">    Unpiv = Table.UnpivotOtherColumns(C2, {"Channel","Region"}, "Category", "Spend"),</a:t>
+            </a:r>
+          </a:p>
+          <a:p>
+            <a:pPr indent="0" marL="0">
+              <a:lnSpc>
+                <a:spcPct val="112000"/>
+              </a:lnSpc>
+              <a:buNone/>
+            </a:pPr>
+            <a:r>
+              <a:rPr lang="en-US" sz="1000" dirty="0">
+                <a:solidFill>
+                  <a:srgbClr val="E5795A"/>
+                </a:solidFill>
+                <a:latin typeface="Consolas" pitchFamily="49" charset="0"/>
+                <a:cs typeface="Consolas" pitchFamily="49" charset="0"/>
+              </a:rPr>
+              <a:t xml:space="preserve">    // ⚠ New spend columns get swept in; pin them if the schema changes</a:t>
+            </a:r>
+          </a:p>
+          <a:p>
+            <a:pPr indent="0" marL="0">
+              <a:lnSpc>
+                <a:spcPct val="112000"/>
+              </a:lnSpc>
+              <a:buNone/>
+            </a:pPr>
+            <a:r>
+              <a:rPr lang="en-US" sz="1000" dirty="0">
+                <a:solidFill>
+                  <a:srgbClr val="D9D2C4"/>
+                </a:solidFill>
+                <a:latin typeface="Consolas" pitchFamily="49" charset="0"/>
+                <a:cs typeface="Consolas" pitchFamily="49" charset="0"/>
+              </a:rPr>
+              <a:t xml:space="preserve">    Grp = Table.Group(Unpiv, {"Channel"}, {{"Total Spend", each List.Sum([Spend])}})</a:t>
+            </a:r>
+          </a:p>
+          <a:p>
+            <a:pPr indent="0" marL="0">
+              <a:lnSpc>
+                <a:spcPct val="112000"/>
+              </a:lnSpc>
+              <a:buNone/>
+            </a:pPr>
+            <a:r>
+              <a:rPr lang="en-US" sz="1000" dirty="0">
+                <a:solidFill>
+                  <a:srgbClr val="E6A93C"/>
+                </a:solidFill>
+                <a:latin typeface="Consolas" pitchFamily="49" charset="0"/>
+                <a:cs typeface="Consolas" pitchFamily="49" charset="0"/>
+              </a:rPr>
+              <a:t xml:space="preserve">in</a:t>
+            </a:r>
+          </a:p>
+          <a:p>
+            <a:pPr indent="0" marL="0">
+              <a:lnSpc>
+                <a:spcPct val="112000"/>
+              </a:lnSpc>
+              <a:buNone/>
+            </a:pPr>
+            <a:r>
+              <a:rPr lang="en-US" sz="1000" dirty="0">
+                <a:solidFill>
+                  <a:srgbClr val="D9D2C4"/>
+                </a:solidFill>
+                <a:latin typeface="Consolas" pitchFamily="49" charset="0"/>
+                <a:cs typeface="Consolas" pitchFamily="49" charset="0"/>
+              </a:rPr>
+              <a:t xml:space="preserve">    Grp</a:t>
+            </a:r>
+          </a:p>
+        </p:txBody>
+      </p:sp>
+      <p:sp>
+        <p:nvSpPr>
+          <p:cNvPr id="6" name="Annot"/>
+          <p:cNvSpPr/>
+          <p:nvPr/>
+        </p:nvSpPr>
+        <p:spPr>
+          <a:xfrm>
+            <a:off x="457200" y="4470000"/>
+            <a:ext cx="8229600" cy="280000"/>
+          </a:xfrm>
+          <a:prstGeom prst="rect">
+            <a:avLst/>
+          </a:prstGeom>
+          <a:noFill/>
+          <a:ln/>
+        </p:spPr>
+        <p:txBody>
+          <a:bodyPr wrap="square" lIns="0" tIns="0" rIns="0" bIns="0" rtlCol="0" anchor="ctr"/>
+          <a:lstStyle/>
+          <a:p>
+            <a:pPr indent="0" marL="0">
+              <a:buNone/>
+            </a:pPr>
+            <a:r>
+              <a:rPr lang="en-US" sz="1100" dirty="0">
+                <a:solidFill>
+                  <a:srgbClr val="707070"/>
+                </a:solidFill>
+                <a:latin typeface="Arial" pitchFamily="34" charset="0"/>
+                <a:ea typeface="Arial" pitchFamily="34" charset="-122"/>
+                <a:cs typeface="Arial" pitchFamily="34" charset="-120"/>
+              </a:rPr>
+              <a:t>Same query, same result on every refresh. AI makes it legible, not magic.</a:t>
+            </a:r>
+            <a:endParaRPr lang="en-US" sz="1100" dirty="0"/>
+          </a:p>
+        </p:txBody>
+      </p:sp>
+      <p:sp>
+        <p:nvSpPr>
+          <p:cNvPr id="7" name="Footer"/>
+          <p:cNvSpPr/>
+          <p:nvPr/>
+        </p:nvSpPr>
+        <p:spPr>
+          <a:xfrm>
+            <a:off x="365760" y="4800600"/>
+            <a:ext cx="6400800" cy="274320"/>
+          </a:xfrm>
+          <a:prstGeom prst="rect">
+            <a:avLst/>
+          </a:prstGeom>
+          <a:noFill/>
+          <a:ln/>
+        </p:spPr>
+        <p:txBody>
+          <a:bodyPr wrap="square" lIns="0" tIns="0" rIns="0" bIns="0" rtlCol="0" anchor="ctr"/>
+          <a:lstStyle/>
+          <a:p>
+            <a:pPr indent="0" marL="0">
+              <a:buNone/>
+            </a:pPr>
+            <a:r>
+              <a:rPr lang="en-US" sz="900" dirty="0">
+                <a:solidFill>
+                  <a:srgbClr val="707070"/>
+                </a:solidFill>
+                <a:latin typeface="Arial" pitchFamily="34" charset="0"/>
+                <a:ea typeface="Arial" pitchFamily="34" charset="-122"/>
+                <a:cs typeface="Arial" pitchFamily="34" charset="-120"/>
+              </a:rPr>
+              <a:t>stringfestanalytics.com  ·  AI for Excel Demo Day  ·  9 / 18</a:t>
+            </a:r>
+            <a:endParaRPr lang="en-US" sz="900" dirty="0"/>
+          </a:p>
+        </p:txBody>
+      </p:sp>
+    </p:spTree>
+  </p:cSld>
+  <p:clrMapOvr>
+    <a:masterClrMapping/>
+  </p:clrMapOvr>
+</p:sld>
+</file>
+
+<file path=ppt/slides/slide18.xml><?xml version="1.0" encoding="utf-8"?>
+<p:sld xmlns:a="http://schemas.openxmlformats.org/drawingml/2006/main" xmlns:r="http://schemas.openxmlformats.org/officeDocument/2006/relationships" xmlns:p="http://schemas.openxmlformats.org/presentationml/2006/main">
+  <p:cSld name="Slide 10">
+    <p:bg>
+      <p:bgPr>
+        <a:solidFill>
+          <a:srgbClr val="EEECE1"/>
+        </a:solidFill>
+      </p:bgPr>
+    </p:bg>
+    <p:spTree>
+      <p:nvGrpSpPr>
+        <p:cNvPr id="1" name=""/>
+        <p:cNvGrpSpPr/>
+        <p:nvPr/>
+      </p:nvGrpSpPr>
+      <p:grpSpPr>
+        <a:xfrm>
+          <a:off x="0" y="0"/>
+          <a:ext cx="0" cy="0"/>
+          <a:chOff x="0" y="0"/>
+          <a:chExt cx="0" cy="0"/>
+        </a:xfrm>
+      </p:grpSpPr>
+      <p:sp>
+        <p:nvSpPr>
+          <p:cNvPr id="2" name="Title"/>
+          <p:cNvSpPr/>
+          <p:nvPr/>
+        </p:nvSpPr>
+        <p:spPr>
+          <a:xfrm>
+            <a:off x="457200" y="320040"/>
+            <a:ext cx="8229600" cy="560000"/>
+          </a:xfrm>
+          <a:prstGeom prst="rect">
+            <a:avLst/>
+          </a:prstGeom>
+          <a:noFill/>
+          <a:ln/>
+        </p:spPr>
+        <p:txBody>
+          <a:bodyPr wrap="square" lIns="0" tIns="0" rIns="0" bIns="0" rtlCol="0" anchor="ctr"/>
+          <a:lstStyle/>
+          <a:p>
+            <a:pPr indent="0" marL="0">
+              <a:buNone/>
+            </a:pPr>
+            <a:r>
+              <a:rPr lang="en-US" sz="3000" b="1" dirty="0">
+                <a:solidFill>
+                  <a:srgbClr val="1F2120"/>
+                </a:solidFill>
+                <a:latin typeface="Arial Black" pitchFamily="34" charset="0"/>
+                <a:ea typeface="Arial Black" pitchFamily="34" charset="-122"/>
+                <a:cs typeface="Arial Black" pitchFamily="34" charset="-120"/>
+              </a:rPr>
+              <a:t>Or skip the clicks entirely</a:t>
+            </a:r>
+            <a:endParaRPr lang="en-US" sz="3000" dirty="0"/>
+          </a:p>
+        </p:txBody>
+      </p:sp>
+      <p:sp>
+        <p:nvSpPr>
+          <p:cNvPr id="3" name="Subtitle"/>
+          <p:cNvSpPr/>
+          <p:nvPr/>
+        </p:nvSpPr>
+        <p:spPr>
+          <a:xfrm>
+            <a:off x="457200" y="900000"/>
+            <a:ext cx="8229600" cy="300000"/>
+          </a:xfrm>
+          <a:prstGeom prst="rect">
+            <a:avLst/>
+          </a:prstGeom>
+          <a:noFill/>
+          <a:ln/>
+        </p:spPr>
+        <p:txBody>
+          <a:bodyPr wrap="square" lIns="0" tIns="0" rIns="0" bIns="0" rtlCol="0" anchor="ctr"/>
+          <a:lstStyle/>
+          <a:p>
+            <a:pPr indent="0" marL="0">
+              <a:buNone/>
+            </a:pPr>
+            <a:r>
+              <a:rPr lang="en-US" sz="1300" i="1" dirty="0">
+                <a:solidFill>
+                  <a:srgbClr val="707070"/>
+                </a:solidFill>
+                <a:latin typeface="Arial" pitchFamily="34" charset="0"/>
+                <a:ea typeface="Arial" pitchFamily="34" charset="-122"/>
+                <a:cs typeface="Arial" pitchFamily="34" charset="-120"/>
+              </a:rPr>
+              <a:t>Describe the transform; paste the M straight into the Advanced Editor.</a:t>
+            </a:r>
+            <a:endParaRPr lang="en-US" sz="1300" dirty="0"/>
+          </a:p>
+        </p:txBody>
+      </p:sp>
+      <p:sp>
+        <p:nvSpPr>
+          <p:cNvPr id="4" name="AskBox"/>
+          <p:cNvSpPr/>
+          <p:nvPr/>
+        </p:nvSpPr>
+        <p:spPr>
+          <a:xfrm>
+            <a:off x="457200" y="1280000"/>
+            <a:ext cx="8229600" cy="640080"/>
+          </a:xfrm>
+          <a:prstGeom prst="roundRect">
+            <a:avLst>
+              <a:gd name="adj" fmla="val 9000"/>
+            </a:avLst>
+          </a:prstGeom>
+          <a:solidFill>
+            <a:srgbClr val="FFFFFF"/>
+          </a:solidFill>
+          <a:ln w="12700">
+            <a:solidFill>
+              <a:srgbClr val="C9C4B5"/>
+            </a:solidFill>
+          </a:ln>
+        </p:spPr>
+        <p:txBody>
+          <a:bodyPr wrap="square" lIns="137160" tIns="45720" rIns="137160" bIns="45720" rtlCol="0" anchor="ctr"/>
+          <a:lstStyle/>
+          <a:p>
+            <a:pPr indent="0" marL="0">
+              <a:buNone/>
+            </a:pPr>
+            <a:r>
+              <a:rPr lang="en-US" sz="1050" b="1" spc="200" dirty="0">
+                <a:solidFill>
+                  <a:srgbClr val="CF3338"/>
+                </a:solidFill>
+                <a:latin typeface="Arial" pitchFamily="34" charset="0"/>
+                <a:ea typeface="Arial" pitchFamily="34" charset="-122"/>
+                <a:cs typeface="Arial" pitchFamily="34" charset="-120"/>
+              </a:rPr>
+              <a:t xml:space="preserve">PROMPT  </a:t>
+            </a:r>
+            <a:r>
+              <a:rPr lang="en-US" sz="1250" i="1" dirty="0">
+                <a:solidFill>
+                  <a:srgbClr val="1F2120"/>
+                </a:solidFill>
+                <a:latin typeface="Arial" pitchFamily="34" charset="0"/>
+                <a:ea typeface="Arial" pitchFamily="34" charset="-122"/>
+                <a:cs typeface="Arial" pitchFamily="34" charset="-120"/>
+              </a:rPr>
+              <a:t>"Write Power Query M: label Channel 1/2 as HoReCa/Retail, unpivot the six spend columns to Category and Spend, group by Channel summing Spend."</a:t>
+            </a:r>
+            <a:endParaRPr lang="en-US" sz="1250" dirty="0"/>
+          </a:p>
+        </p:txBody>
+      </p:sp>
+      <p:sp>
+        <p:nvSpPr>
+          <p:cNvPr id="5" name="CodePanel"/>
+          <p:cNvSpPr/>
+          <p:nvPr/>
+        </p:nvSpPr>
+        <p:spPr>
+          <a:xfrm>
+            <a:off x="457200" y="1990000"/>
+            <a:ext cx="8229600" cy="2430000"/>
+          </a:xfrm>
+          <a:prstGeom prst="roundRect">
+            <a:avLst>
+              <a:gd name="adj" fmla="val 4000"/>
+            </a:avLst>
+          </a:prstGeom>
+          <a:solidFill>
+            <a:srgbClr val="1F2120"/>
+          </a:solidFill>
+          <a:ln/>
+        </p:spPr>
+        <p:txBody>
+          <a:bodyPr wrap="square" lIns="182880" tIns="137160" rIns="182880" bIns="137160" rtlCol="0" anchor="ctr"/>
+          <a:lstStyle/>
+          <a:p>
+            <a:pPr indent="0" marL="0">
+              <a:lnSpc>
+                <a:spcPct val="112000"/>
+              </a:lnSpc>
+              <a:buNone/>
+            </a:pPr>
+            <a:r>
+              <a:rPr lang="en-US" sz="1000" dirty="0">
+                <a:solidFill>
+                  <a:srgbClr val="E6A93C"/>
+                </a:solidFill>
+                <a:latin typeface="Consolas" pitchFamily="49" charset="0"/>
+                <a:cs typeface="Consolas" pitchFamily="49" charset="0"/>
+              </a:rPr>
+              <a:t xml:space="preserve">let</a:t>
+            </a:r>
+          </a:p>
+          <a:p>
+            <a:pPr indent="0" marL="0">
+              <a:lnSpc>
+                <a:spcPct val="112000"/>
+              </a:lnSpc>
+              <a:buNone/>
+            </a:pPr>
+            <a:r>
+              <a:rPr lang="en-US" sz="1000" dirty="0">
+                <a:solidFill>
+                  <a:srgbClr val="D9D2C4"/>
+                </a:solidFill>
+                <a:latin typeface="Consolas" pitchFamily="49" charset="0"/>
+                <a:cs typeface="Consolas" pitchFamily="49" charset="0"/>
+              </a:rPr>
+              <a:t xml:space="preserve">    Src = Excel.CurrentWorkbook(){[Name="Wholesale"]}[Content],</a:t>
+            </a:r>
+          </a:p>
+          <a:p>
+            <a:pPr indent="0" marL="0">
+              <a:lnSpc>
+                <a:spcPct val="112000"/>
+              </a:lnSpc>
+              <a:buNone/>
+            </a:pPr>
+            <a:r>
+              <a:rPr lang="en-US" sz="1000" dirty="0">
+                <a:solidFill>
+                  <a:srgbClr val="D9D2C4"/>
+                </a:solidFill>
+                <a:latin typeface="Consolas" pitchFamily="49" charset="0"/>
+                <a:cs typeface="Consolas" pitchFamily="49" charset="0"/>
+              </a:rPr>
+              <a:t xml:space="preserve">    C1 = Table.ReplaceValue(Src, 1, "HoReCa", Replacer.ReplaceValue, {"Channel"}),</a:t>
+            </a:r>
+          </a:p>
+          <a:p>
+            <a:pPr indent="0" marL="0">
+              <a:lnSpc>
+                <a:spcPct val="112000"/>
+              </a:lnSpc>
+              <a:buNone/>
+            </a:pPr>
+            <a:r>
+              <a:rPr lang="en-US" sz="1000" dirty="0">
+                <a:solidFill>
+                  <a:srgbClr val="D9D2C4"/>
+                </a:solidFill>
+                <a:latin typeface="Consolas" pitchFamily="49" charset="0"/>
+                <a:cs typeface="Consolas" pitchFamily="49" charset="0"/>
+              </a:rPr>
+              <a:t xml:space="preserve">    C2 = Table.ReplaceValue(C1, 2, "Retail", Replacer.ReplaceValue, {"Channel"}),</a:t>
+            </a:r>
+          </a:p>
+          <a:p>
+            <a:pPr indent="0" marL="0">
+              <a:lnSpc>
+                <a:spcPct val="112000"/>
+              </a:lnSpc>
+              <a:buNone/>
+            </a:pPr>
+            <a:r>
+              <a:rPr lang="en-US" sz="1000" dirty="0">
+                <a:solidFill>
+                  <a:srgbClr val="D9D2C4"/>
+                </a:solidFill>
+                <a:latin typeface="Consolas" pitchFamily="49" charset="0"/>
+                <a:cs typeface="Consolas" pitchFamily="49" charset="0"/>
+              </a:rPr>
+              <a:t xml:space="preserve">    Unpiv = Table.UnpivotOtherColumns(C2, {"Channel","Region"}, "Category", "Spend"),</a:t>
+            </a:r>
+          </a:p>
+          <a:p>
+            <a:pPr indent="0" marL="0">
+              <a:lnSpc>
+                <a:spcPct val="112000"/>
+              </a:lnSpc>
+              <a:buNone/>
+            </a:pPr>
+            <a:r>
+              <a:rPr lang="en-US" sz="1000" dirty="0">
+                <a:solidFill>
+                  <a:srgbClr val="D9D2C4"/>
+                </a:solidFill>
+                <a:latin typeface="Consolas" pitchFamily="49" charset="0"/>
+                <a:cs typeface="Consolas" pitchFamily="49" charset="0"/>
+              </a:rPr>
+              <a:t xml:space="preserve">    Grp = Table.Group(Unpiv, {"Channel"}, {{"Total Spend", each List.Sum([Spend])}})</a:t>
+            </a:r>
+          </a:p>
+          <a:p>
+            <a:pPr indent="0" marL="0">
+              <a:lnSpc>
+                <a:spcPct val="112000"/>
+              </a:lnSpc>
+              <a:buNone/>
+            </a:pPr>
+            <a:r>
+              <a:rPr lang="en-US" sz="1000" dirty="0">
+                <a:solidFill>
+                  <a:srgbClr val="E6A93C"/>
+                </a:solidFill>
+                <a:latin typeface="Consolas" pitchFamily="49" charset="0"/>
+                <a:cs typeface="Consolas" pitchFamily="49" charset="0"/>
+              </a:rPr>
+              <a:t xml:space="preserve">in</a:t>
+            </a:r>
+          </a:p>
+          <a:p>
+            <a:pPr indent="0" marL="0">
+              <a:lnSpc>
+                <a:spcPct val="112000"/>
+              </a:lnSpc>
+              <a:buNone/>
+            </a:pPr>
+            <a:r>
+              <a:rPr lang="en-US" sz="1000" dirty="0">
+                <a:solidFill>
+                  <a:srgbClr val="D9D2C4"/>
+                </a:solidFill>
+                <a:latin typeface="Consolas" pitchFamily="49" charset="0"/>
+                <a:cs typeface="Consolas" pitchFamily="49" charset="0"/>
+              </a:rPr>
+              <a:t xml:space="preserve">    Grp</a:t>
+            </a:r>
+          </a:p>
+        </p:txBody>
+      </p:sp>
+      <p:sp>
+        <p:nvSpPr>
+          <p:cNvPr id="6" name="Annot"/>
+          <p:cNvSpPr/>
+          <p:nvPr/>
+        </p:nvSpPr>
+        <p:spPr>
+          <a:xfrm>
+            <a:off x="457200" y="4470000"/>
+            <a:ext cx="8229600" cy="280000"/>
+          </a:xfrm>
+          <a:prstGeom prst="rect">
+            <a:avLst/>
+          </a:prstGeom>
+          <a:noFill/>
+          <a:ln/>
+        </p:spPr>
+        <p:txBody>
+          <a:bodyPr wrap="square" lIns="0" tIns="0" rIns="0" bIns="0" rtlCol="0" anchor="ctr"/>
+          <a:lstStyle/>
+          <a:p>
+            <a:pPr indent="0" marL="0">
+              <a:buNone/>
+            </a:pPr>
+            <a:r>
+              <a:rPr lang="en-US" sz="1100" dirty="0">
+                <a:solidFill>
+                  <a:srgbClr val="707070"/>
+                </a:solidFill>
+                <a:latin typeface="Arial" pitchFamily="34" charset="0"/>
+                <a:ea typeface="Arial" pitchFamily="34" charset="-122"/>
+                <a:cs typeface="Arial" pitchFamily="34" charset="-120"/>
+              </a:rPr>
+              <a:t>Powerful, but you own the output. Read it before you trust it; one bad line breaks the refresh.</a:t>
+            </a:r>
+            <a:endParaRPr lang="en-US" sz="1100" dirty="0"/>
+          </a:p>
+        </p:txBody>
+      </p:sp>
+      <p:sp>
+        <p:nvSpPr>
+          <p:cNvPr id="7" name="Footer"/>
+          <p:cNvSpPr/>
+          <p:nvPr/>
+        </p:nvSpPr>
+        <p:spPr>
+          <a:xfrm>
+            <a:off x="365760" y="4800600"/>
+            <a:ext cx="6400800" cy="274320"/>
+          </a:xfrm>
+          <a:prstGeom prst="rect">
+            <a:avLst/>
+          </a:prstGeom>
+          <a:noFill/>
+          <a:ln/>
+        </p:spPr>
+        <p:txBody>
+          <a:bodyPr wrap="square" lIns="0" tIns="0" rIns="0" bIns="0" rtlCol="0" anchor="ctr"/>
+          <a:lstStyle/>
+          <a:p>
+            <a:pPr indent="0" marL="0">
+              <a:buNone/>
+            </a:pPr>
+            <a:r>
+              <a:rPr lang="en-US" sz="900" dirty="0">
+                <a:solidFill>
+                  <a:srgbClr val="707070"/>
+                </a:solidFill>
+                <a:latin typeface="Arial" pitchFamily="34" charset="0"/>
+                <a:ea typeface="Arial" pitchFamily="34" charset="-122"/>
+                <a:cs typeface="Arial" pitchFamily="34" charset="-120"/>
+              </a:rPr>
+              <a:t>stringfestanalytics.com  ·  AI for Excel Demo Day  ·  10 / 18</a:t>
             </a:r>
             <a:endParaRPr lang="en-US" sz="900" dirty="0"/>
           </a:p>
@@ -6765,7 +7600,7 @@
                 <a:ea typeface="Arial" pitchFamily="34" charset="-122"/>
                 <a:cs typeface="Arial" pitchFamily="34" charset="-120"/>
               </a:rPr>
-              <a:t>stringfestanalytics.com  ·  AI for Excel Demo Day  ·  2 / 16</a:t>
+              <a:t>stringfestanalytics.com  ·  AI for Excel Demo Day  ·  2 / 18</a:t>
             </a:r>
             <a:endParaRPr lang="en-US" sz="900" dirty="0"/>
           </a:p>
@@ -10343,7 +11178,7 @@
                 <a:ea typeface="Arial" pitchFamily="34" charset="-122"/>
                 <a:cs typeface="Arial" pitchFamily="34" charset="-120"/>
               </a:rPr>
-              <a:t>stringfestanalytics.com  ·  AI for Excel Demo Day  ·  3 / 16</a:t>
+              <a:t>stringfestanalytics.com  ·  AI for Excel Demo Day  ·  3 / 18</a:t>
             </a:r>
             <a:endParaRPr lang="en-US" sz="900" dirty="0"/>
           </a:p>
@@ -10876,7 +11711,7 @@
                 <a:ea typeface="Arial" pitchFamily="34" charset="-122"/>
                 <a:cs typeface="Arial" pitchFamily="34" charset="-120"/>
               </a:rPr>
-              <a:t>stringfestanalytics.com  ·  AI for Excel Demo Day  ·  4 / 16</a:t>
+              <a:t>stringfestanalytics.com  ·  AI for Excel Demo Day  ·  4 / 18</a:t>
             </a:r>
             <a:endParaRPr lang="en-US" sz="900" dirty="0"/>
           </a:p>
@@ -11475,7 +12310,7 @@
                 <a:ea typeface="Arial" pitchFamily="34" charset="-122"/>
                 <a:cs typeface="Arial" pitchFamily="34" charset="-120"/>
               </a:rPr>
-              <a:t>stringfestanalytics.com  ·  AI for Excel Demo Day  ·  5 / 16</a:t>
+              <a:t>stringfestanalytics.com  ·  AI for Excel Demo Day  ·  5 / 18</a:t>
             </a:r>
             <a:endParaRPr lang="en-US" sz="900" dirty="0"/>
           </a:p>
@@ -12050,7 +12885,7 @@
                 <a:ea typeface="Arial" pitchFamily="34" charset="-122"/>
                 <a:cs typeface="Arial" pitchFamily="34" charset="-120"/>
               </a:rPr>
-              <a:t>stringfestanalytics.com  ·  AI for Excel Demo Day  ·  6 / 16</a:t>
+              <a:t>stringfestanalytics.com  ·  AI for Excel Demo Day  ·  6 / 18</a:t>
             </a:r>
             <a:endParaRPr lang="en-US" sz="900" dirty="0"/>
           </a:p>
@@ -12443,7 +13278,7 @@
                 <a:ea typeface="Arial" pitchFamily="34" charset="-122"/>
                 <a:cs typeface="Arial" pitchFamily="34" charset="-120"/>
               </a:rPr>
-              <a:t>stringfestanalytics.com  ·  AI for Excel Demo Day  ·  7 / 16</a:t>
+              <a:t>stringfestanalytics.com  ·  AI for Excel Demo Day  ·  7 / 18</a:t>
             </a:r>
             <a:endParaRPr lang="en-US" sz="900" dirty="0"/>
           </a:p>
@@ -13093,7 +13928,7 @@
                 <a:ea typeface="Arial" pitchFamily="34" charset="-122"/>
                 <a:cs typeface="Arial" pitchFamily="34" charset="-120"/>
               </a:rPr>
-              <a:t>stringfestanalytics.com  ·  AI for Excel Demo Day  ·  8 / 16</a:t>
+              <a:t>stringfestanalytics.com  ·  AI for Excel Demo Day  ·  8 / 18</a:t>
             </a:r>
             <a:endParaRPr lang="en-US" sz="900" dirty="0"/>
           </a:p>
